--- a/03-课件PPT/讲次版/第5章-4-讲次 5-4 · Agent Eval核心护城河.pptx
+++ b/03-课件PPT/讲次版/第5章-4-讲次 5-4 · Agent Eval核心护城河.pptx
@@ -37,6 +37,7 @@
     <p:sldId id="285" r:id="rId36"/>
     <p:sldId id="286" r:id="rId37"/>
     <p:sldId id="287" r:id="rId38"/>
+    <p:sldId id="288" r:id="rId39"/>
   </p:sldIdLst>
   <p:sldSz cx="12192000" cy="6858000" type="screen4x3"/>
   <p:notesSz cx="6858000" cy="9144000"/>
@@ -4828,7 +4829,7 @@
                 </a:solidFill>
                 <a:latin typeface="PingFang SC"/>
               </a:rPr>
-              <a:t>第5章 · 10/32</a:t>
+              <a:t>第5章 · 10/33</a:t>
             </a:r>
           </a:p>
         </p:txBody>
@@ -6039,7 +6040,7 @@
                 </a:solidFill>
                 <a:latin typeface="PingFang SC"/>
               </a:rPr>
-              <a:t>第5章 · 11/32</a:t>
+              <a:t>第5章 · 11/33</a:t>
             </a:r>
           </a:p>
         </p:txBody>
@@ -6347,7 +6348,7 @@
                 </a:solidFill>
                 <a:latin typeface="PingFang SC"/>
               </a:rPr>
-              <a:t>第5章 · 12/32</a:t>
+              <a:t>第5章 · 12/33</a:t>
             </a:r>
           </a:p>
         </p:txBody>
@@ -7342,7 +7343,7 @@
                 </a:solidFill>
                 <a:latin typeface="PingFang SC"/>
               </a:rPr>
-              <a:t>第5章 · 13/32</a:t>
+              <a:t>第5章 · 13/33</a:t>
             </a:r>
           </a:p>
         </p:txBody>
@@ -8252,7 +8253,7 @@
                 </a:solidFill>
                 <a:latin typeface="PingFang SC"/>
               </a:rPr>
-              <a:t>第5章 · 14/32</a:t>
+              <a:t>第5章 · 14/33</a:t>
             </a:r>
           </a:p>
         </p:txBody>
@@ -9247,7 +9248,7 @@
                 </a:solidFill>
                 <a:latin typeface="PingFang SC"/>
               </a:rPr>
-              <a:t>第5章 · 15/32</a:t>
+              <a:t>第5章 · 15/33</a:t>
             </a:r>
           </a:p>
         </p:txBody>
@@ -10582,7 +10583,7 @@
                 </a:solidFill>
                 <a:latin typeface="PingFang SC"/>
               </a:rPr>
-              <a:t>抽检校准(防偏置)|顺序随机化+双 Judge</a:t>
+              <a:t>抽检校准(防偏置)</a:t>
             </a:r>
           </a:p>
         </p:txBody>
@@ -10621,7 +10622,7 @@
                 </a:solidFill>
                 <a:latin typeface="PingFang SC"/>
               </a:rPr>
-              <a:t>第5章 · 16/32</a:t>
+              <a:t>第5章 · 16/33</a:t>
             </a:r>
           </a:p>
         </p:txBody>
@@ -11531,7 +11532,7 @@
                 </a:solidFill>
                 <a:latin typeface="PingFang SC"/>
               </a:rPr>
-              <a:t>第5章 · 17/32</a:t>
+              <a:t>第5章 · 17/33</a:t>
             </a:r>
           </a:p>
         </p:txBody>
@@ -11722,46 +11723,7 @@
       </p:sp>
       <p:sp>
         <p:nvSpPr>
-          <p:cNvPr id="5" name="TextBox 4"/>
-          <p:cNvSpPr txBox="1"/>
-          <p:nvPr/>
-        </p:nvSpPr>
-        <p:spPr>
-          <a:xfrm>
-            <a:off x="9334500" y="0"/>
-            <a:ext cx="2667000" cy="704850"/>
-          </a:xfrm>
-          <a:prstGeom prst="rect">
-            <a:avLst/>
-          </a:prstGeom>
-          <a:noFill/>
-        </p:spPr>
-        <p:txBody>
-          <a:bodyPr wrap="square" anchor="ctr">
-            <a:spAutoFit/>
-          </a:bodyPr>
-          <a:lstStyle/>
-          <a:p>
-            <a:pPr algn="r">
-              <a:lnSpc>
-                <a:spcPct val="100000"/>
-              </a:lnSpc>
-            </a:pPr>
-            <a:r>
-              <a:rPr sz="1100" b="0">
-                <a:solidFill>
-                  <a:srgbClr val="94A3B8"/>
-                </a:solidFill>
-                <a:latin typeface="PingFang SC"/>
-              </a:rPr>
-              <a:t>人工评测:最终关卡(最贵);LLM-as-Judge:开放式评分(需校准);Golden+规则:确定性基线(进 CI)|成本自底向上递增</a:t>
-            </a:r>
-          </a:p>
-        </p:txBody>
-      </p:sp>
-      <p:sp>
-        <p:nvSpPr>
-          <p:cNvPr id="6" name="Rounded Rectangle 5"/>
+          <p:cNvPr id="5" name="Rounded Rectangle 4"/>
           <p:cNvSpPr/>
           <p:nvPr/>
         </p:nvSpPr>
@@ -11809,7 +11771,7 @@
       </p:sp>
       <p:sp>
         <p:nvSpPr>
-          <p:cNvPr id="7" name="Rectangle 6"/>
+          <p:cNvPr id="6" name="Rectangle 5"/>
           <p:cNvSpPr/>
           <p:nvPr/>
         </p:nvSpPr>
@@ -11853,14 +11815,53 @@
       </p:sp>
       <p:sp>
         <p:nvSpPr>
+          <p:cNvPr id="7" name="TextBox 6"/>
+          <p:cNvSpPr txBox="1"/>
+          <p:nvPr/>
+        </p:nvSpPr>
+        <p:spPr>
+          <a:xfrm>
+            <a:off x="5126355" y="1333500"/>
+            <a:ext cx="881710" cy="1066800"/>
+          </a:xfrm>
+          <a:prstGeom prst="rect">
+            <a:avLst/>
+          </a:prstGeom>
+          <a:noFill/>
+        </p:spPr>
+        <p:txBody>
+          <a:bodyPr wrap="square" anchor="ctr">
+            <a:spAutoFit/>
+          </a:bodyPr>
+          <a:lstStyle/>
+          <a:p>
+            <a:pPr algn="l">
+              <a:lnSpc>
+                <a:spcPct val="100000"/>
+              </a:lnSpc>
+            </a:pPr>
+            <a:r>
+              <a:rPr sz="1600" b="1">
+                <a:solidFill>
+                  <a:srgbClr val="8B5CF6"/>
+                </a:solidFill>
+                <a:latin typeface="PingFang SC"/>
+              </a:rPr>
+              <a:t>人工评测</a:t>
+            </a:r>
+          </a:p>
+        </p:txBody>
+      </p:sp>
+      <p:sp>
+        <p:nvSpPr>
           <p:cNvPr id="8" name="TextBox 7"/>
           <p:cNvSpPr txBox="1"/>
           <p:nvPr/>
         </p:nvSpPr>
         <p:spPr>
           <a:xfrm>
-            <a:off x="5126355" y="1333500"/>
-            <a:ext cx="881710" cy="1066800"/>
+            <a:off x="5863971" y="1333500"/>
+            <a:ext cx="1345768" cy="1066800"/>
           </a:xfrm>
           <a:prstGeom prst="rect">
             <a:avLst/>
@@ -11879,45 +11880,6 @@
               </a:lnSpc>
             </a:pPr>
             <a:r>
-              <a:rPr sz="1600" b="1">
-                <a:solidFill>
-                  <a:srgbClr val="8B5CF6"/>
-                </a:solidFill>
-                <a:latin typeface="PingFang SC"/>
-              </a:rPr>
-              <a:t>人工评测</a:t>
-            </a:r>
-          </a:p>
-        </p:txBody>
-      </p:sp>
-      <p:sp>
-        <p:nvSpPr>
-          <p:cNvPr id="9" name="TextBox 8"/>
-          <p:cNvSpPr txBox="1"/>
-          <p:nvPr/>
-        </p:nvSpPr>
-        <p:spPr>
-          <a:xfrm>
-            <a:off x="5863971" y="1333500"/>
-            <a:ext cx="1345768" cy="1066800"/>
-          </a:xfrm>
-          <a:prstGeom prst="rect">
-            <a:avLst/>
-          </a:prstGeom>
-          <a:noFill/>
-        </p:spPr>
-        <p:txBody>
-          <a:bodyPr wrap="square" anchor="ctr">
-            <a:spAutoFit/>
-          </a:bodyPr>
-          <a:lstStyle/>
-          <a:p>
-            <a:pPr algn="l">
-              <a:lnSpc>
-                <a:spcPct val="100000"/>
-              </a:lnSpc>
-            </a:pPr>
-            <a:r>
               <a:rPr sz="1200" b="0">
                 <a:solidFill>
                   <a:srgbClr val="475569"/>
@@ -11931,7 +11893,7 @@
       </p:sp>
       <p:cxnSp>
         <p:nvCxnSpPr>
-          <p:cNvPr id="10" name="Connector 9"/>
+          <p:cNvPr id="9" name="Connector 8"/>
           <p:cNvCxnSpPr/>
           <p:nvPr/>
         </p:nvCxnSpPr>
@@ -11966,7 +11928,7 @@
       </p:cxnSp>
       <p:sp>
         <p:nvSpPr>
-          <p:cNvPr id="11" name="Isosceles Triangle 10"/>
+          <p:cNvPr id="10" name="Isosceles Triangle 9"/>
           <p:cNvSpPr/>
           <p:nvPr/>
         </p:nvSpPr>
@@ -12010,7 +11972,7 @@
       </p:sp>
       <p:sp>
         <p:nvSpPr>
-          <p:cNvPr id="12" name="Rounded Rectangle 11"/>
+          <p:cNvPr id="11" name="Rounded Rectangle 10"/>
           <p:cNvSpPr/>
           <p:nvPr/>
         </p:nvSpPr>
@@ -12058,7 +12020,7 @@
       </p:sp>
       <p:sp>
         <p:nvSpPr>
-          <p:cNvPr id="13" name="Rectangle 12"/>
+          <p:cNvPr id="12" name="Rectangle 11"/>
           <p:cNvSpPr/>
           <p:nvPr/>
         </p:nvSpPr>
@@ -12102,14 +12064,53 @@
       </p:sp>
       <p:sp>
         <p:nvSpPr>
+          <p:cNvPr id="13" name="TextBox 12"/>
+          <p:cNvSpPr txBox="1"/>
+          <p:nvPr/>
+        </p:nvSpPr>
+        <p:spPr>
+          <a:xfrm>
+            <a:off x="4325302" y="2609850"/>
+            <a:ext cx="1490510" cy="1066800"/>
+          </a:xfrm>
+          <a:prstGeom prst="rect">
+            <a:avLst/>
+          </a:prstGeom>
+          <a:noFill/>
+        </p:spPr>
+        <p:txBody>
+          <a:bodyPr wrap="square" anchor="ctr">
+            <a:spAutoFit/>
+          </a:bodyPr>
+          <a:lstStyle/>
+          <a:p>
+            <a:pPr algn="l">
+              <a:lnSpc>
+                <a:spcPct val="100000"/>
+              </a:lnSpc>
+            </a:pPr>
+            <a:r>
+              <a:rPr sz="1600" b="1">
+                <a:solidFill>
+                  <a:srgbClr val="14B8A6"/>
+                </a:solidFill>
+                <a:latin typeface="PingFang SC"/>
+              </a:rPr>
+              <a:t>LLM-as-Judge</a:t>
+            </a:r>
+          </a:p>
+        </p:txBody>
+      </p:sp>
+      <p:sp>
+        <p:nvSpPr>
           <p:cNvPr id="14" name="TextBox 13"/>
           <p:cNvSpPr txBox="1"/>
           <p:nvPr/>
         </p:nvSpPr>
         <p:spPr>
           <a:xfrm>
-            <a:off x="4325302" y="2609850"/>
-            <a:ext cx="1490510" cy="1066800"/>
+            <a:off x="5703760" y="2609850"/>
+            <a:ext cx="2274989" cy="1066800"/>
           </a:xfrm>
           <a:prstGeom prst="rect">
             <a:avLst/>
@@ -12128,45 +12129,6 @@
               </a:lnSpc>
             </a:pPr>
             <a:r>
-              <a:rPr sz="1600" b="1">
-                <a:solidFill>
-                  <a:srgbClr val="14B8A6"/>
-                </a:solidFill>
-                <a:latin typeface="PingFang SC"/>
-              </a:rPr>
-              <a:t>LLM-as-Judge</a:t>
-            </a:r>
-          </a:p>
-        </p:txBody>
-      </p:sp>
-      <p:sp>
-        <p:nvSpPr>
-          <p:cNvPr id="15" name="TextBox 14"/>
-          <p:cNvSpPr txBox="1"/>
-          <p:nvPr/>
-        </p:nvSpPr>
-        <p:spPr>
-          <a:xfrm>
-            <a:off x="5703760" y="2609850"/>
-            <a:ext cx="2274989" cy="1066800"/>
-          </a:xfrm>
-          <a:prstGeom prst="rect">
-            <a:avLst/>
-          </a:prstGeom>
-          <a:noFill/>
-        </p:spPr>
-        <p:txBody>
-          <a:bodyPr wrap="square" anchor="ctr">
-            <a:spAutoFit/>
-          </a:bodyPr>
-          <a:lstStyle/>
-          <a:p>
-            <a:pPr algn="l">
-              <a:lnSpc>
-                <a:spcPct val="100000"/>
-              </a:lnSpc>
-            </a:pPr>
-            <a:r>
               <a:rPr sz="1200" b="0">
                 <a:solidFill>
                   <a:srgbClr val="475569"/>
@@ -12180,7 +12142,7 @@
       </p:sp>
       <p:cxnSp>
         <p:nvCxnSpPr>
-          <p:cNvPr id="16" name="Connector 15"/>
+          <p:cNvPr id="15" name="Connector 14"/>
           <p:cNvCxnSpPr/>
           <p:nvPr/>
         </p:nvCxnSpPr>
@@ -12215,7 +12177,7 @@
       </p:cxnSp>
       <p:sp>
         <p:nvSpPr>
-          <p:cNvPr id="17" name="Isosceles Triangle 16"/>
+          <p:cNvPr id="16" name="Isosceles Triangle 15"/>
           <p:cNvSpPr/>
           <p:nvPr/>
         </p:nvSpPr>
@@ -12259,7 +12221,7 @@
       </p:sp>
       <p:sp>
         <p:nvSpPr>
-          <p:cNvPr id="18" name="Rounded Rectangle 17"/>
+          <p:cNvPr id="17" name="Rounded Rectangle 16"/>
           <p:cNvSpPr/>
           <p:nvPr/>
         </p:nvSpPr>
@@ -12307,7 +12269,7 @@
       </p:sp>
       <p:sp>
         <p:nvSpPr>
-          <p:cNvPr id="19" name="Rectangle 18"/>
+          <p:cNvPr id="18" name="Rectangle 17"/>
           <p:cNvSpPr/>
           <p:nvPr/>
         </p:nvSpPr>
@@ -12351,14 +12313,53 @@
       </p:sp>
       <p:sp>
         <p:nvSpPr>
+          <p:cNvPr id="19" name="TextBox 18"/>
+          <p:cNvSpPr txBox="1"/>
+          <p:nvPr/>
+        </p:nvSpPr>
+        <p:spPr>
+          <a:xfrm>
+            <a:off x="3524250" y="3886200"/>
+            <a:ext cx="2099310" cy="1066800"/>
+          </a:xfrm>
+          <a:prstGeom prst="rect">
+            <a:avLst/>
+          </a:prstGeom>
+          <a:noFill/>
+        </p:spPr>
+        <p:txBody>
+          <a:bodyPr wrap="square" anchor="ctr">
+            <a:spAutoFit/>
+          </a:bodyPr>
+          <a:lstStyle/>
+          <a:p>
+            <a:pPr algn="l">
+              <a:lnSpc>
+                <a:spcPct val="100000"/>
+              </a:lnSpc>
+            </a:pPr>
+            <a:r>
+              <a:rPr sz="1600" b="1">
+                <a:solidFill>
+                  <a:srgbClr val="2563EB"/>
+                </a:solidFill>
+                <a:latin typeface="PingFang SC"/>
+              </a:rPr>
+              <a:t>Golden+规则</a:t>
+            </a:r>
+          </a:p>
+        </p:txBody>
+      </p:sp>
+      <p:sp>
+        <p:nvSpPr>
           <p:cNvPr id="20" name="TextBox 19"/>
           <p:cNvSpPr txBox="1"/>
           <p:nvPr/>
         </p:nvSpPr>
         <p:spPr>
           <a:xfrm>
-            <a:off x="3524250" y="3886200"/>
-            <a:ext cx="2099310" cy="1066800"/>
+            <a:off x="5543550" y="3886200"/>
+            <a:ext cx="3204210" cy="1066800"/>
           </a:xfrm>
           <a:prstGeom prst="rect">
             <a:avLst/>
@@ -12377,13 +12378,13 @@
               </a:lnSpc>
             </a:pPr>
             <a:r>
-              <a:rPr sz="1600" b="1">
-                <a:solidFill>
-                  <a:srgbClr val="2563EB"/>
+              <a:rPr sz="1200" b="0">
+                <a:solidFill>
+                  <a:srgbClr val="475569"/>
                 </a:solidFill>
                 <a:latin typeface="PingFang SC"/>
               </a:rPr>
-              <a:t>Golden+规则</a:t>
+              <a:t>确定性基线(进 CI)</a:t>
             </a:r>
           </a:p>
         </p:txBody>
@@ -12396,8 +12397,8 @@
         </p:nvSpPr>
         <p:spPr>
           <a:xfrm>
-            <a:off x="5543550" y="3886200"/>
-            <a:ext cx="3204210" cy="1066800"/>
+            <a:off x="10287000" y="6534150"/>
+            <a:ext cx="1619250" cy="266700"/>
           </a:xfrm>
           <a:prstGeom prst="rect">
             <a:avLst/>
@@ -12410,19 +12411,19 @@
           </a:bodyPr>
           <a:lstStyle/>
           <a:p>
-            <a:pPr algn="l">
+            <a:pPr algn="r">
               <a:lnSpc>
                 <a:spcPct val="100000"/>
               </a:lnSpc>
             </a:pPr>
             <a:r>
-              <a:rPr sz="1200" b="0">
-                <a:solidFill>
-                  <a:srgbClr val="475569"/>
+              <a:rPr sz="900" b="0">
+                <a:solidFill>
+                  <a:srgbClr val="94A3B8"/>
                 </a:solidFill>
                 <a:latin typeface="PingFang SC"/>
               </a:rPr>
-              <a:t>确定性基线(进 CI)|成本自底向上递增</a:t>
+              <a:t>第5章 · 18/33</a:t>
             </a:r>
           </a:p>
         </p:txBody>
@@ -12430,45 +12431,6 @@
       <p:sp>
         <p:nvSpPr>
           <p:cNvPr id="22" name="TextBox 21"/>
-          <p:cNvSpPr txBox="1"/>
-          <p:nvPr/>
-        </p:nvSpPr>
-        <p:spPr>
-          <a:xfrm>
-            <a:off x="10287000" y="6534150"/>
-            <a:ext cx="1619250" cy="266700"/>
-          </a:xfrm>
-          <a:prstGeom prst="rect">
-            <a:avLst/>
-          </a:prstGeom>
-          <a:noFill/>
-        </p:spPr>
-        <p:txBody>
-          <a:bodyPr wrap="square" anchor="ctr">
-            <a:spAutoFit/>
-          </a:bodyPr>
-          <a:lstStyle/>
-          <a:p>
-            <a:pPr algn="r">
-              <a:lnSpc>
-                <a:spcPct val="100000"/>
-              </a:lnSpc>
-            </a:pPr>
-            <a:r>
-              <a:rPr sz="900" b="0">
-                <a:solidFill>
-                  <a:srgbClr val="94A3B8"/>
-                </a:solidFill>
-                <a:latin typeface="PingFang SC"/>
-              </a:rPr>
-              <a:t>第5章 · 18/32</a:t>
-            </a:r>
-          </a:p>
-        </p:txBody>
-      </p:sp>
-      <p:sp>
-        <p:nvSpPr>
-          <p:cNvPr id="23" name="TextBox 22"/>
           <p:cNvSpPr txBox="1"/>
           <p:nvPr/>
         </p:nvSpPr>
@@ -13456,7 +13418,7 @@
                 </a:solidFill>
                 <a:latin typeface="PingFang SC"/>
               </a:rPr>
-              <a:t>第5章 · 19/32</a:t>
+              <a:t>第5章 · 19/33</a:t>
             </a:r>
           </a:p>
         </p:txBody>
@@ -15062,7 +15024,7 @@
                 </a:solidFill>
                 <a:latin typeface="PingFang SC"/>
               </a:rPr>
-              <a:t>第5章 · 2/32</a:t>
+              <a:t>第5章 · 2/33</a:t>
             </a:r>
           </a:p>
         </p:txBody>
@@ -15253,53 +15215,14 @@
       </p:sp>
       <p:sp>
         <p:nvSpPr>
-          <p:cNvPr id="5" name="TextBox 4"/>
-          <p:cNvSpPr txBox="1"/>
-          <p:nvPr/>
-        </p:nvSpPr>
-        <p:spPr>
-          <a:xfrm>
-            <a:off x="9334500" y="0"/>
-            <a:ext cx="2667000" cy="704850"/>
-          </a:xfrm>
-          <a:prstGeom prst="rect">
-            <a:avLst/>
-          </a:prstGeom>
-          <a:noFill/>
-        </p:spPr>
-        <p:txBody>
-          <a:bodyPr wrap="square" anchor="ctr">
-            <a:spAutoFit/>
-          </a:bodyPr>
-          <a:lstStyle/>
-          <a:p>
-            <a:pPr algn="r">
-              <a:lnSpc>
-                <a:spcPct val="100000"/>
-              </a:lnSpc>
-            </a:pPr>
-            <a:r>
-              <a:rPr sz="1100" b="0">
-                <a:solidFill>
-                  <a:srgbClr val="94A3B8"/>
-                </a:solidFill>
-                <a:latin typeface="PingFang SC"/>
-              </a:rPr>
-              <a:t>$ EvalRunner.regression(old, new);RegressionDelta(improved=['c1'], regressed=[]);# improved: 新版本修好的用例;# regressed: 弄坏的用例(CI 阻断);# 平台门禁:regressed 非空 → 禁止合并|tests 真实断言</a:t>
-            </a:r>
-          </a:p>
-        </p:txBody>
-      </p:sp>
-      <p:sp>
-        <p:nvSpPr>
-          <p:cNvPr id="6" name="Rounded Rectangle 5"/>
-          <p:cNvSpPr/>
-          <p:nvPr/>
-        </p:nvSpPr>
-        <p:spPr>
-          <a:xfrm>
-            <a:off x="1333500" y="952500"/>
-            <a:ext cx="9525000" cy="5048250"/>
+          <p:cNvPr id="5" name="Rounded Rectangle 4"/>
+          <p:cNvSpPr/>
+          <p:nvPr/>
+        </p:nvSpPr>
+        <p:spPr>
+          <a:xfrm>
+            <a:off x="1333500" y="1047750"/>
+            <a:ext cx="9525000" cy="2667000"/>
           </a:xfrm>
           <a:prstGeom prst="roundRect">
             <a:avLst>
@@ -15338,13 +15261,13 @@
       </p:sp>
       <p:sp>
         <p:nvSpPr>
-          <p:cNvPr id="7" name="Rectangle 6"/>
-          <p:cNvSpPr/>
-          <p:nvPr/>
-        </p:nvSpPr>
-        <p:spPr>
-          <a:xfrm>
-            <a:off x="1333500" y="952500"/>
+          <p:cNvPr id="6" name="Rectangle 5"/>
+          <p:cNvSpPr/>
+          <p:nvPr/>
+        </p:nvSpPr>
+        <p:spPr>
+          <a:xfrm>
+            <a:off x="1333500" y="1047750"/>
             <a:ext cx="9525000" cy="381000"/>
           </a:xfrm>
           <a:prstGeom prst="rect">
@@ -15382,13 +15305,13 @@
       </p:sp>
       <p:sp>
         <p:nvSpPr>
-          <p:cNvPr id="8" name="Rounded Rectangle 7"/>
-          <p:cNvSpPr/>
-          <p:nvPr/>
-        </p:nvSpPr>
-        <p:spPr>
-          <a:xfrm>
-            <a:off x="1504950" y="1085850"/>
+          <p:cNvPr id="7" name="Rounded Rectangle 6"/>
+          <p:cNvSpPr/>
+          <p:nvPr/>
+        </p:nvSpPr>
+        <p:spPr>
+          <a:xfrm>
+            <a:off x="1504950" y="1181100"/>
             <a:ext cx="123825" cy="123825"/>
           </a:xfrm>
           <a:prstGeom prst="roundRect">
@@ -15428,13 +15351,13 @@
       </p:sp>
       <p:sp>
         <p:nvSpPr>
-          <p:cNvPr id="9" name="Rounded Rectangle 8"/>
-          <p:cNvSpPr/>
-          <p:nvPr/>
-        </p:nvSpPr>
-        <p:spPr>
-          <a:xfrm>
-            <a:off x="1752600" y="1085850"/>
+          <p:cNvPr id="8" name="Rounded Rectangle 7"/>
+          <p:cNvSpPr/>
+          <p:nvPr/>
+        </p:nvSpPr>
+        <p:spPr>
+          <a:xfrm>
+            <a:off x="1752600" y="1181100"/>
             <a:ext cx="123825" cy="123825"/>
           </a:xfrm>
           <a:prstGeom prst="roundRect">
@@ -15474,13 +15397,13 @@
       </p:sp>
       <p:sp>
         <p:nvSpPr>
-          <p:cNvPr id="10" name="Rounded Rectangle 9"/>
-          <p:cNvSpPr/>
-          <p:nvPr/>
-        </p:nvSpPr>
-        <p:spPr>
-          <a:xfrm>
-            <a:off x="2000250" y="1085850"/>
+          <p:cNvPr id="9" name="Rounded Rectangle 8"/>
+          <p:cNvSpPr/>
+          <p:nvPr/>
+        </p:nvSpPr>
+        <p:spPr>
+          <a:xfrm>
+            <a:off x="2000250" y="1181100"/>
             <a:ext cx="123825" cy="123825"/>
           </a:xfrm>
           <a:prstGeom prst="roundRect">
@@ -15520,14 +15443,156 @@
       </p:sp>
       <p:sp>
         <p:nvSpPr>
+          <p:cNvPr id="10" name="TextBox 9"/>
+          <p:cNvSpPr txBox="1"/>
+          <p:nvPr/>
+        </p:nvSpPr>
+        <p:spPr>
+          <a:xfrm>
+            <a:off x="2381250" y="1047750"/>
+            <a:ext cx="8286750" cy="381000"/>
+          </a:xfrm>
+          <a:prstGeom prst="rect">
+            <a:avLst/>
+          </a:prstGeom>
+          <a:noFill/>
+        </p:spPr>
+        <p:txBody>
+          <a:bodyPr wrap="square" anchor="ctr">
+            <a:spAutoFit/>
+          </a:bodyPr>
+          <a:lstStyle/>
+          <a:p>
+            <a:pPr algn="l">
+              <a:lnSpc>
+                <a:spcPct val="100000"/>
+              </a:lnSpc>
+            </a:pPr>
+            <a:r>
+              <a:rPr sz="1100" b="0">
+                <a:solidFill>
+                  <a:srgbClr val="94A3B8"/>
+                </a:solidFill>
+                <a:latin typeface="PingFang SC"/>
+              </a:rPr>
+              <a:t>terminal — 平台实测</a:t>
+            </a:r>
+          </a:p>
+        </p:txBody>
+      </p:sp>
+      <p:sp>
+        <p:nvSpPr>
           <p:cNvPr id="11" name="TextBox 10"/>
           <p:cNvSpPr txBox="1"/>
           <p:nvPr/>
         </p:nvSpPr>
         <p:spPr>
           <a:xfrm>
-            <a:off x="2381250" y="952500"/>
-            <a:ext cx="8286750" cy="381000"/>
+            <a:off x="1562100" y="1581150"/>
+            <a:ext cx="9067800" cy="2000250"/>
+          </a:xfrm>
+          <a:prstGeom prst="rect">
+            <a:avLst/>
+          </a:prstGeom>
+          <a:noFill/>
+        </p:spPr>
+        <p:txBody>
+          <a:bodyPr wrap="square">
+            <a:spAutoFit/>
+          </a:bodyPr>
+          <a:lstStyle/>
+          <a:p>
+            <a:pPr>
+              <a:lnSpc>
+                <a:spcPct val="115000"/>
+              </a:lnSpc>
+            </a:pPr>
+            <a:r>
+              <a:rPr sz="1300" b="1">
+                <a:solidFill>
+                  <a:srgbClr val="34D399"/>
+                </a:solidFill>
+                <a:latin typeface="Menlo"/>
+              </a:rPr>
+              <a:t>$ EvalRunner.regression(old, new)</a:t>
+            </a:r>
+          </a:p>
+          <a:p>
+            <a:pPr>
+              <a:lnSpc>
+                <a:spcPct val="115000"/>
+              </a:lnSpc>
+            </a:pPr>
+            <a:r>
+              <a:rPr sz="1300">
+                <a:solidFill>
+                  <a:srgbClr val="CBD5E1"/>
+                </a:solidFill>
+                <a:latin typeface="Menlo"/>
+              </a:rPr>
+              <a:t>RegressionDelta(improved=['c1'], regressed=[])</a:t>
+            </a:r>
+          </a:p>
+          <a:p>
+            <a:pPr>
+              <a:lnSpc>
+                <a:spcPct val="115000"/>
+              </a:lnSpc>
+            </a:pPr>
+            <a:r>
+              <a:rPr sz="1300">
+                <a:solidFill>
+                  <a:srgbClr val="94A3B8"/>
+                </a:solidFill>
+                <a:latin typeface="Menlo"/>
+              </a:rPr>
+              <a:t># improved: 新版本修好的用例</a:t>
+            </a:r>
+          </a:p>
+          <a:p>
+            <a:pPr>
+              <a:lnSpc>
+                <a:spcPct val="115000"/>
+              </a:lnSpc>
+            </a:pPr>
+            <a:r>
+              <a:rPr sz="1300">
+                <a:solidFill>
+                  <a:srgbClr val="94A3B8"/>
+                </a:solidFill>
+                <a:latin typeface="Menlo"/>
+              </a:rPr>
+              <a:t># regressed: 弄坏的用例(CI 阻断)</a:t>
+            </a:r>
+          </a:p>
+          <a:p>
+            <a:pPr>
+              <a:lnSpc>
+                <a:spcPct val="115000"/>
+              </a:lnSpc>
+            </a:pPr>
+            <a:r>
+              <a:rPr sz="1300">
+                <a:solidFill>
+                  <a:srgbClr val="94A3B8"/>
+                </a:solidFill>
+                <a:latin typeface="Menlo"/>
+              </a:rPr>
+              <a:t># 平台门禁:regressed 非空 → 禁止合并</a:t>
+            </a:r>
+          </a:p>
+        </p:txBody>
+      </p:sp>
+      <p:sp>
+        <p:nvSpPr>
+          <p:cNvPr id="12" name="TextBox 11"/>
+          <p:cNvSpPr txBox="1"/>
+          <p:nvPr/>
+        </p:nvSpPr>
+        <p:spPr>
+          <a:xfrm>
+            <a:off x="10287000" y="6534150"/>
+            <a:ext cx="1619250" cy="266700"/>
           </a:xfrm>
           <a:prstGeom prst="rect">
             <a:avLst/>
@@ -15540,122 +15605,19 @@
           </a:bodyPr>
           <a:lstStyle/>
           <a:p>
-            <a:pPr algn="l">
+            <a:pPr algn="r">
               <a:lnSpc>
                 <a:spcPct val="100000"/>
               </a:lnSpc>
             </a:pPr>
             <a:r>
-              <a:rPr sz="1100" b="0">
+              <a:rPr sz="900" b="0">
                 <a:solidFill>
                   <a:srgbClr val="94A3B8"/>
                 </a:solidFill>
                 <a:latin typeface="PingFang SC"/>
               </a:rPr>
-              <a:t>terminal — 平台实测</a:t>
-            </a:r>
-          </a:p>
-        </p:txBody>
-      </p:sp>
-      <p:sp>
-        <p:nvSpPr>
-          <p:cNvPr id="12" name="TextBox 11"/>
-          <p:cNvSpPr txBox="1"/>
-          <p:nvPr/>
-        </p:nvSpPr>
-        <p:spPr>
-          <a:xfrm>
-            <a:off x="1562100" y="1485900"/>
-            <a:ext cx="9067800" cy="4381500"/>
-          </a:xfrm>
-          <a:prstGeom prst="rect">
-            <a:avLst/>
-          </a:prstGeom>
-          <a:noFill/>
-        </p:spPr>
-        <p:txBody>
-          <a:bodyPr wrap="square">
-            <a:spAutoFit/>
-          </a:bodyPr>
-          <a:lstStyle/>
-          <a:p>
-            <a:pPr>
-              <a:lnSpc>
-                <a:spcPct val="115000"/>
-              </a:lnSpc>
-            </a:pPr>
-            <a:r>
-              <a:rPr sz="1300" b="1">
-                <a:solidFill>
-                  <a:srgbClr val="34D399"/>
-                </a:solidFill>
-                <a:latin typeface="Menlo"/>
-              </a:rPr>
-              <a:t>$ EvalRunner.regression(old, new)</a:t>
-            </a:r>
-          </a:p>
-          <a:p>
-            <a:pPr>
-              <a:lnSpc>
-                <a:spcPct val="115000"/>
-              </a:lnSpc>
-            </a:pPr>
-            <a:r>
-              <a:rPr sz="1300">
-                <a:solidFill>
-                  <a:srgbClr val="CBD5E1"/>
-                </a:solidFill>
-                <a:latin typeface="Menlo"/>
-              </a:rPr>
-              <a:t>RegressionDelta(improved=['c1'], regressed=[])</a:t>
-            </a:r>
-          </a:p>
-          <a:p>
-            <a:pPr>
-              <a:lnSpc>
-                <a:spcPct val="115000"/>
-              </a:lnSpc>
-            </a:pPr>
-            <a:r>
-              <a:rPr sz="1300">
-                <a:solidFill>
-                  <a:srgbClr val="94A3B8"/>
-                </a:solidFill>
-                <a:latin typeface="Menlo"/>
-              </a:rPr>
-              <a:t># improved: 新版本修好的用例</a:t>
-            </a:r>
-          </a:p>
-          <a:p>
-            <a:pPr>
-              <a:lnSpc>
-                <a:spcPct val="115000"/>
-              </a:lnSpc>
-            </a:pPr>
-            <a:r>
-              <a:rPr sz="1300">
-                <a:solidFill>
-                  <a:srgbClr val="94A3B8"/>
-                </a:solidFill>
-                <a:latin typeface="Menlo"/>
-              </a:rPr>
-              <a:t># regressed: 弄坏的用例(CI 阻断)</a:t>
-            </a:r>
-          </a:p>
-          <a:p>
-            <a:pPr>
-              <a:lnSpc>
-                <a:spcPct val="115000"/>
-              </a:lnSpc>
-            </a:pPr>
-            <a:r>
-              <a:rPr sz="1300">
-                <a:solidFill>
-                  <a:srgbClr val="94A3B8"/>
-                </a:solidFill>
-                <a:latin typeface="Menlo"/>
-              </a:rPr>
-              <a:t># 平台门禁:regressed 非空 → 禁止合并</a:t>
+              <a:t>第5章 · 20/33</a:t>
             </a:r>
           </a:p>
         </p:txBody>
@@ -15663,45 +15625,6 @@
       <p:sp>
         <p:nvSpPr>
           <p:cNvPr id="13" name="TextBox 12"/>
-          <p:cNvSpPr txBox="1"/>
-          <p:nvPr/>
-        </p:nvSpPr>
-        <p:spPr>
-          <a:xfrm>
-            <a:off x="10287000" y="6534150"/>
-            <a:ext cx="1619250" cy="266700"/>
-          </a:xfrm>
-          <a:prstGeom prst="rect">
-            <a:avLst/>
-          </a:prstGeom>
-          <a:noFill/>
-        </p:spPr>
-        <p:txBody>
-          <a:bodyPr wrap="square" anchor="ctr">
-            <a:spAutoFit/>
-          </a:bodyPr>
-          <a:lstStyle/>
-          <a:p>
-            <a:pPr algn="r">
-              <a:lnSpc>
-                <a:spcPct val="100000"/>
-              </a:lnSpc>
-            </a:pPr>
-            <a:r>
-              <a:rPr sz="900" b="0">
-                <a:solidFill>
-                  <a:srgbClr val="94A3B8"/>
-                </a:solidFill>
-                <a:latin typeface="PingFang SC"/>
-              </a:rPr>
-              <a:t>第5章 · 20/32</a:t>
-            </a:r>
-          </a:p>
-        </p:txBody>
-      </p:sp>
-      <p:sp>
-        <p:nvSpPr>
-          <p:cNvPr id="14" name="TextBox 13"/>
           <p:cNvSpPr txBox="1"/>
           <p:nvPr/>
         </p:nvSpPr>
@@ -16604,7 +16527,7 @@
                 </a:solidFill>
                 <a:latin typeface="PingFang SC"/>
               </a:rPr>
-              <a:t>第5章 · 21/32</a:t>
+              <a:t>第5章 · 21/33</a:t>
             </a:r>
           </a:p>
         </p:txBody>
@@ -17383,7 +17306,7 @@
                 </a:solidFill>
                 <a:latin typeface="PingFang SC"/>
               </a:rPr>
-              <a:t>第5章 · 22/32</a:t>
+              <a:t>第5章 · 22/33</a:t>
             </a:r>
           </a:p>
         </p:txBody>
@@ -18293,7 +18216,7 @@
                 </a:solidFill>
                 <a:latin typeface="PingFang SC"/>
               </a:rPr>
-              <a:t>第5章 · 23/32</a:t>
+              <a:t>第5章 · 23/33</a:t>
             </a:r>
           </a:p>
         </p:txBody>
@@ -19203,7 +19126,7 @@
                 </a:solidFill>
                 <a:latin typeface="PingFang SC"/>
               </a:rPr>
-              <a:t>第5章 · 24/32</a:t>
+              <a:t>第5章 · 24/33</a:t>
             </a:r>
           </a:p>
         </p:txBody>
@@ -20152,7 +20075,7 @@
                 </a:solidFill>
                 <a:latin typeface="PingFang SC"/>
               </a:rPr>
-              <a:t>偏爱同源风格→双 Judge+人工抽检|重要结论必配人工</a:t>
+              <a:t>偏爱同源风格→双 Judge+人工抽检</a:t>
             </a:r>
           </a:p>
         </p:txBody>
@@ -20191,7 +20114,7 @@
                 </a:solidFill>
                 <a:latin typeface="PingFang SC"/>
               </a:rPr>
-              <a:t>第5章 · 25/32</a:t>
+              <a:t>第5章 · 25/33</a:t>
             </a:r>
           </a:p>
         </p:txBody>
@@ -20970,7 +20893,7 @@
                 </a:solidFill>
                 <a:latin typeface="PingFang SC"/>
               </a:rPr>
-              <a:t>第5章 · 26/32</a:t>
+              <a:t>第5章 · 26/33</a:t>
             </a:r>
           </a:p>
         </p:txBody>
@@ -21232,7 +21155,7 @@
                 </a:solidFill>
                 <a:latin typeface="PingFang SC"/>
               </a:rPr>
-              <a:t>第5章 · 27/32</a:t>
+              <a:t>第5章 · 27/33</a:t>
             </a:r>
           </a:p>
         </p:txBody>
@@ -22227,7 +22150,7 @@
                 </a:solidFill>
                 <a:latin typeface="PingFang SC"/>
               </a:rPr>
-              <a:t>第5章 · 28/32</a:t>
+              <a:t>第5章 · 28/33</a:t>
             </a:r>
           </a:p>
         </p:txBody>
@@ -22411,60 +22334,21 @@
                 </a:solidFill>
                 <a:latin typeface="PingFang SC"/>
               </a:rPr>
-              <a:t>EvalRunner 数据结构</a:t>
-            </a:r>
-          </a:p>
-        </p:txBody>
-      </p:sp>
-      <p:sp>
-        <p:nvSpPr>
-          <p:cNvPr id="5" name="TextBox 4"/>
-          <p:cNvSpPr txBox="1"/>
-          <p:nvPr/>
-        </p:nvSpPr>
-        <p:spPr>
-          <a:xfrm>
-            <a:off x="9334500" y="0"/>
-            <a:ext cx="2667000" cy="704850"/>
-          </a:xfrm>
-          <a:prstGeom prst="rect">
-            <a:avLst/>
-          </a:prstGeom>
-          <a:noFill/>
-        </p:spPr>
-        <p:txBody>
-          <a:bodyPr wrap="square" anchor="ctr">
-            <a:spAutoFit/>
-          </a:bodyPr>
-          <a:lstStyle/>
-          <a:p>
-            <a:pPr algn="r">
-              <a:lnSpc>
-                <a:spcPct val="100000"/>
-              </a:lnSpc>
-            </a:pPr>
-            <a:r>
-              <a:rPr sz="1100" b="0">
-                <a:solidFill>
-                  <a:srgbClr val="94A3B8"/>
-                </a:solidFill>
-                <a:latin typeface="PingFang SC"/>
-              </a:rPr>
-              <a:t>第5章</a:t>
-            </a:r>
-          </a:p>
-        </p:txBody>
-      </p:sp>
-      <p:sp>
-        <p:nvSpPr>
-          <p:cNvPr id="6" name="Rounded Rectangle 5"/>
-          <p:cNvSpPr/>
-          <p:nvPr/>
-        </p:nvSpPr>
-        <p:spPr>
-          <a:xfrm>
-            <a:off x="876300" y="914400"/>
-            <a:ext cx="10439400" cy="1028700"/>
+              <a:t>2026 前沿④:Agent 工程化平台</a:t>
+            </a:r>
+          </a:p>
+        </p:txBody>
+      </p:sp>
+      <p:sp>
+        <p:nvSpPr>
+          <p:cNvPr id="5" name="Rounded Rectangle 4"/>
+          <p:cNvSpPr/>
+          <p:nvPr/>
+        </p:nvSpPr>
+        <p:spPr>
+          <a:xfrm>
+            <a:off x="1047750" y="1724025"/>
+            <a:ext cx="4924425" cy="1524000"/>
           </a:xfrm>
           <a:prstGeom prst="roundRect">
             <a:avLst>
@@ -22505,14 +22389,14 @@
       </p:sp>
       <p:sp>
         <p:nvSpPr>
-          <p:cNvPr id="7" name="Rectangle 6"/>
-          <p:cNvSpPr/>
-          <p:nvPr/>
-        </p:nvSpPr>
-        <p:spPr>
-          <a:xfrm>
-            <a:off x="876300" y="914400"/>
-            <a:ext cx="57150" cy="1028700"/>
+          <p:cNvPr id="6" name="Rectangle 5"/>
+          <p:cNvSpPr/>
+          <p:nvPr/>
+        </p:nvSpPr>
+        <p:spPr>
+          <a:xfrm>
+            <a:off x="1047750" y="1724025"/>
+            <a:ext cx="4924425" cy="57150"/>
           </a:xfrm>
           <a:prstGeom prst="rect">
             <a:avLst/>
@@ -22549,14 +22433,14 @@
       </p:sp>
       <p:sp>
         <p:nvSpPr>
-          <p:cNvPr id="8" name="Rounded Rectangle 7"/>
-          <p:cNvSpPr/>
-          <p:nvPr/>
-        </p:nvSpPr>
-        <p:spPr>
-          <a:xfrm>
-            <a:off x="1047750" y="1285875"/>
-            <a:ext cx="285750" cy="285750"/>
+          <p:cNvPr id="7" name="Rounded Rectangle 6"/>
+          <p:cNvSpPr/>
+          <p:nvPr/>
+        </p:nvSpPr>
+        <p:spPr>
+          <a:xfrm>
+            <a:off x="1200150" y="1914525"/>
+            <a:ext cx="323850" cy="323850"/>
           </a:xfrm>
           <a:prstGeom prst="roundRect">
             <a:avLst>
@@ -22595,14 +22479,53 @@
       </p:sp>
       <p:sp>
         <p:nvSpPr>
+          <p:cNvPr id="8" name="TextBox 7"/>
+          <p:cNvSpPr txBox="1"/>
+          <p:nvPr/>
+        </p:nvSpPr>
+        <p:spPr>
+          <a:xfrm>
+            <a:off x="1200150" y="1914525"/>
+            <a:ext cx="323850" cy="323850"/>
+          </a:xfrm>
+          <a:prstGeom prst="rect">
+            <a:avLst/>
+          </a:prstGeom>
+          <a:noFill/>
+        </p:spPr>
+        <p:txBody>
+          <a:bodyPr wrap="square" anchor="ctr">
+            <a:spAutoFit/>
+          </a:bodyPr>
+          <a:lstStyle/>
+          <a:p>
+            <a:pPr algn="ctr">
+              <a:lnSpc>
+                <a:spcPct val="100000"/>
+              </a:lnSpc>
+            </a:pPr>
+            <a:r>
+              <a:rPr sz="1200" b="1">
+                <a:solidFill>
+                  <a:srgbClr val="FFFFFF"/>
+                </a:solidFill>
+                <a:latin typeface="PingFang SC"/>
+              </a:rPr>
+              <a:t>01</a:t>
+            </a:r>
+          </a:p>
+        </p:txBody>
+      </p:sp>
+      <p:sp>
+        <p:nvSpPr>
           <p:cNvPr id="9" name="TextBox 8"/>
           <p:cNvSpPr txBox="1"/>
           <p:nvPr/>
         </p:nvSpPr>
         <p:spPr>
           <a:xfrm>
-            <a:off x="1047750" y="1276350"/>
-            <a:ext cx="285750" cy="285750"/>
+            <a:off x="1638300" y="1933575"/>
+            <a:ext cx="4181475" cy="285750"/>
           </a:xfrm>
           <a:prstGeom prst="rect">
             <a:avLst/>
@@ -22615,19 +22538,19 @@
           </a:bodyPr>
           <a:lstStyle/>
           <a:p>
-            <a:pPr algn="ctr">
+            <a:pPr algn="l">
               <a:lnSpc>
                 <a:spcPct val="100000"/>
               </a:lnSpc>
             </a:pPr>
             <a:r>
-              <a:rPr sz="1300" b="1">
-                <a:solidFill>
-                  <a:srgbClr val="FFFFFF"/>
+              <a:rPr sz="1400" b="1">
+                <a:solidFill>
+                  <a:srgbClr val="0B1D3A"/>
                 </a:solidFill>
                 <a:latin typeface="PingFang SC"/>
               </a:rPr>
-              <a:t>1</a:t>
+              <a:t>LLM OS 叙事</a:t>
             </a:r>
           </a:p>
         </p:txBody>
@@ -22640,8 +22563,8 @@
         </p:nvSpPr>
         <p:spPr>
           <a:xfrm>
-            <a:off x="1485900" y="914400"/>
-            <a:ext cx="9601200" cy="1028700"/>
+            <a:off x="1200150" y="2333625"/>
+            <a:ext cx="4619625" cy="781050"/>
           </a:xfrm>
           <a:prstGeom prst="rect">
             <a:avLst/>
@@ -22656,17 +22579,17 @@
           <a:p>
             <a:pPr algn="l">
               <a:lnSpc>
-                <a:spcPct val="112000"/>
-              </a:lnSpc>
-            </a:pPr>
-            <a:r>
-              <a:rPr sz="1400" b="1">
+                <a:spcPct val="110000"/>
+              </a:lnSpc>
+            </a:pPr>
+            <a:r>
+              <a:rPr sz="1150" b="0">
                 <a:solidFill>
                   <a:srgbClr val="475569"/>
                 </a:solidFill>
                 <a:latin typeface="PingFang SC"/>
               </a:rPr>
-              <a:t>GoldenCase → AgentAnswer → CaseVerdict</a:t>
+              <a:t>Agent 成为新应用层</a:t>
             </a:r>
           </a:p>
         </p:txBody>
@@ -22679,8 +22602,8 @@
         </p:nvSpPr>
         <p:spPr>
           <a:xfrm>
-            <a:off x="876300" y="2114550"/>
-            <a:ext cx="10439400" cy="1028700"/>
+            <a:off x="6219825" y="1724025"/>
+            <a:ext cx="4924425" cy="1524000"/>
           </a:xfrm>
           <a:prstGeom prst="roundRect">
             <a:avLst>
@@ -22727,8 +22650,8 @@
         </p:nvSpPr>
         <p:spPr>
           <a:xfrm>
-            <a:off x="876300" y="2114550"/>
-            <a:ext cx="57150" cy="1028700"/>
+            <a:off x="6219825" y="1724025"/>
+            <a:ext cx="4924425" cy="57150"/>
           </a:xfrm>
           <a:prstGeom prst="rect">
             <a:avLst/>
@@ -22771,8 +22694,8 @@
         </p:nvSpPr>
         <p:spPr>
           <a:xfrm>
-            <a:off x="1047750" y="2486025"/>
-            <a:ext cx="285750" cy="285750"/>
+            <a:off x="6372225" y="1914525"/>
+            <a:ext cx="323850" cy="323850"/>
           </a:xfrm>
           <a:prstGeom prst="roundRect">
             <a:avLst>
@@ -22817,8 +22740,8 @@
         </p:nvSpPr>
         <p:spPr>
           <a:xfrm>
-            <a:off x="1047750" y="2476500"/>
-            <a:ext cx="285750" cy="285750"/>
+            <a:off x="6372225" y="1914525"/>
+            <a:ext cx="323850" cy="323850"/>
           </a:xfrm>
           <a:prstGeom prst="rect">
             <a:avLst/>
@@ -22837,13 +22760,13 @@
               </a:lnSpc>
             </a:pPr>
             <a:r>
-              <a:rPr sz="1300" b="1">
+              <a:rPr sz="1200" b="1">
                 <a:solidFill>
                   <a:srgbClr val="FFFFFF"/>
                 </a:solidFill>
                 <a:latin typeface="PingFang SC"/>
               </a:rPr>
-              <a:t>2</a:t>
+              <a:t>02</a:t>
             </a:r>
           </a:p>
         </p:txBody>
@@ -22856,8 +22779,8 @@
         </p:nvSpPr>
         <p:spPr>
           <a:xfrm>
-            <a:off x="1485900" y="2114550"/>
-            <a:ext cx="9601200" cy="1028700"/>
+            <a:off x="6810375" y="1933575"/>
+            <a:ext cx="4181475" cy="285750"/>
           </a:xfrm>
           <a:prstGeom prst="rect">
             <a:avLst/>
@@ -22872,31 +22795,70 @@
           <a:p>
             <a:pPr algn="l">
               <a:lnSpc>
-                <a:spcPct val="112000"/>
+                <a:spcPct val="100000"/>
               </a:lnSpc>
             </a:pPr>
             <a:r>
               <a:rPr sz="1400" b="1">
                 <a:solidFill>
+                  <a:srgbClr val="0B1D3A"/>
+                </a:solidFill>
+                <a:latin typeface="PingFang SC"/>
+              </a:rPr>
+              <a:t>LangSmith</a:t>
+            </a:r>
+          </a:p>
+        </p:txBody>
+      </p:sp>
+      <p:sp>
+        <p:nvSpPr>
+          <p:cNvPr id="16" name="TextBox 15"/>
+          <p:cNvSpPr txBox="1"/>
+          <p:nvPr/>
+        </p:nvSpPr>
+        <p:spPr>
+          <a:xfrm>
+            <a:off x="6372225" y="2333625"/>
+            <a:ext cx="4619625" cy="781050"/>
+          </a:xfrm>
+          <a:prstGeom prst="rect">
+            <a:avLst/>
+          </a:prstGeom>
+          <a:noFill/>
+        </p:spPr>
+        <p:txBody>
+          <a:bodyPr wrap="square" anchor="ctr">
+            <a:spAutoFit/>
+          </a:bodyPr>
+          <a:lstStyle/>
+          <a:p>
+            <a:pPr algn="l">
+              <a:lnSpc>
+                <a:spcPct val="110000"/>
+              </a:lnSpc>
+            </a:pPr>
+            <a:r>
+              <a:rPr sz="1150" b="0">
+                <a:solidFill>
                   <a:srgbClr val="475569"/>
                 </a:solidFill>
                 <a:latin typeface="PingFang SC"/>
               </a:rPr>
-              <a:t>EvalReport:成功率+工具准确率</a:t>
-            </a:r>
-          </a:p>
-        </p:txBody>
-      </p:sp>
-      <p:sp>
-        <p:nvSpPr>
-          <p:cNvPr id="16" name="Rounded Rectangle 15"/>
-          <p:cNvSpPr/>
-          <p:nvPr/>
-        </p:nvSpPr>
-        <p:spPr>
-          <a:xfrm>
-            <a:off x="876300" y="3314700"/>
-            <a:ext cx="10439400" cy="1028700"/>
+              <a:t>trace 数据飞轮(标注→训练)</a:t>
+            </a:r>
+          </a:p>
+        </p:txBody>
+      </p:sp>
+      <p:sp>
+        <p:nvSpPr>
+          <p:cNvPr id="17" name="Rounded Rectangle 16"/>
+          <p:cNvSpPr/>
+          <p:nvPr/>
+        </p:nvSpPr>
+        <p:spPr>
+          <a:xfrm>
+            <a:off x="1047750" y="3495675"/>
+            <a:ext cx="4924425" cy="1524000"/>
           </a:xfrm>
           <a:prstGeom prst="roundRect">
             <a:avLst>
@@ -22937,14 +22899,14 @@
       </p:sp>
       <p:sp>
         <p:nvSpPr>
-          <p:cNvPr id="17" name="Rectangle 16"/>
-          <p:cNvSpPr/>
-          <p:nvPr/>
-        </p:nvSpPr>
-        <p:spPr>
-          <a:xfrm>
-            <a:off x="876300" y="3314700"/>
-            <a:ext cx="57150" cy="1028700"/>
+          <p:cNvPr id="18" name="Rectangle 17"/>
+          <p:cNvSpPr/>
+          <p:nvPr/>
+        </p:nvSpPr>
+        <p:spPr>
+          <a:xfrm>
+            <a:off x="1047750" y="3495675"/>
+            <a:ext cx="4924425" cy="57150"/>
           </a:xfrm>
           <a:prstGeom prst="rect">
             <a:avLst/>
@@ -22981,14 +22943,14 @@
       </p:sp>
       <p:sp>
         <p:nvSpPr>
-          <p:cNvPr id="18" name="Rounded Rectangle 17"/>
-          <p:cNvSpPr/>
-          <p:nvPr/>
-        </p:nvSpPr>
-        <p:spPr>
-          <a:xfrm>
-            <a:off x="1047750" y="3686175"/>
-            <a:ext cx="285750" cy="285750"/>
+          <p:cNvPr id="19" name="Rounded Rectangle 18"/>
+          <p:cNvSpPr/>
+          <p:nvPr/>
+        </p:nvSpPr>
+        <p:spPr>
+          <a:xfrm>
+            <a:off x="1200150" y="3686175"/>
+            <a:ext cx="323850" cy="323850"/>
           </a:xfrm>
           <a:prstGeom prst="roundRect">
             <a:avLst>
@@ -23027,14 +22989,14 @@
       </p:sp>
       <p:sp>
         <p:nvSpPr>
-          <p:cNvPr id="19" name="TextBox 18"/>
+          <p:cNvPr id="20" name="TextBox 19"/>
           <p:cNvSpPr txBox="1"/>
           <p:nvPr/>
         </p:nvSpPr>
         <p:spPr>
           <a:xfrm>
-            <a:off x="1047750" y="3676650"/>
-            <a:ext cx="285750" cy="285750"/>
+            <a:off x="1200150" y="3686175"/>
+            <a:ext cx="323850" cy="323850"/>
           </a:xfrm>
           <a:prstGeom prst="rect">
             <a:avLst/>
@@ -23053,27 +23015,27 @@
               </a:lnSpc>
             </a:pPr>
             <a:r>
-              <a:rPr sz="1300" b="1">
+              <a:rPr sz="1200" b="1">
                 <a:solidFill>
                   <a:srgbClr val="FFFFFF"/>
                 </a:solidFill>
                 <a:latin typeface="PingFang SC"/>
               </a:rPr>
-              <a:t>3</a:t>
-            </a:r>
-          </a:p>
-        </p:txBody>
-      </p:sp>
-      <p:sp>
-        <p:nvSpPr>
-          <p:cNvPr id="20" name="TextBox 19"/>
+              <a:t>03</a:t>
+            </a:r>
+          </a:p>
+        </p:txBody>
+      </p:sp>
+      <p:sp>
+        <p:nvSpPr>
+          <p:cNvPr id="21" name="TextBox 20"/>
           <p:cNvSpPr txBox="1"/>
           <p:nvPr/>
         </p:nvSpPr>
         <p:spPr>
           <a:xfrm>
-            <a:off x="1485900" y="3314700"/>
-            <a:ext cx="9601200" cy="1028700"/>
+            <a:off x="1638300" y="3705225"/>
+            <a:ext cx="4181475" cy="285750"/>
           </a:xfrm>
           <a:prstGeom prst="rect">
             <a:avLst/>
@@ -23088,31 +23050,70 @@
           <a:p>
             <a:pPr algn="l">
               <a:lnSpc>
-                <a:spcPct val="112000"/>
+                <a:spcPct val="100000"/>
               </a:lnSpc>
             </a:pPr>
             <a:r>
               <a:rPr sz="1400" b="1">
                 <a:solidFill>
+                  <a:srgbClr val="0B1D3A"/>
+                </a:solidFill>
+                <a:latin typeface="PingFang SC"/>
+              </a:rPr>
+              <a:t>AgentOps</a:t>
+            </a:r>
+          </a:p>
+        </p:txBody>
+      </p:sp>
+      <p:sp>
+        <p:nvSpPr>
+          <p:cNvPr id="22" name="TextBox 21"/>
+          <p:cNvSpPr txBox="1"/>
+          <p:nvPr/>
+        </p:nvSpPr>
+        <p:spPr>
+          <a:xfrm>
+            <a:off x="1200150" y="4105275"/>
+            <a:ext cx="4619625" cy="781050"/>
+          </a:xfrm>
+          <a:prstGeom prst="rect">
+            <a:avLst/>
+          </a:prstGeom>
+          <a:noFill/>
+        </p:spPr>
+        <p:txBody>
+          <a:bodyPr wrap="square" anchor="ctr">
+            <a:spAutoFit/>
+          </a:bodyPr>
+          <a:lstStyle/>
+          <a:p>
+            <a:pPr algn="l">
+              <a:lnSpc>
+                <a:spcPct val="110000"/>
+              </a:lnSpc>
+            </a:pPr>
+            <a:r>
+              <a:rPr sz="1150" b="0">
+                <a:solidFill>
                   <a:srgbClr val="475569"/>
                 </a:solidFill>
                 <a:latin typeface="PingFang SC"/>
               </a:rPr>
-              <a:t>RegressionDelta:improved/regressed</a:t>
-            </a:r>
-          </a:p>
-        </p:txBody>
-      </p:sp>
-      <p:sp>
-        <p:nvSpPr>
-          <p:cNvPr id="21" name="Rounded Rectangle 20"/>
-          <p:cNvSpPr/>
-          <p:nvPr/>
-        </p:nvSpPr>
-        <p:spPr>
-          <a:xfrm>
-            <a:off x="876300" y="6019800"/>
-            <a:ext cx="10439400" cy="514350"/>
+              <a:t>上线后健康分+回放即调试</a:t>
+            </a:r>
+          </a:p>
+        </p:txBody>
+      </p:sp>
+      <p:sp>
+        <p:nvSpPr>
+          <p:cNvPr id="23" name="Rounded Rectangle 22"/>
+          <p:cNvSpPr/>
+          <p:nvPr/>
+        </p:nvSpPr>
+        <p:spPr>
+          <a:xfrm>
+            <a:off x="6219825" y="3495675"/>
+            <a:ext cx="4924425" cy="1524000"/>
           </a:xfrm>
           <a:prstGeom prst="roundRect">
             <a:avLst>
@@ -23120,7 +23121,53 @@
             </a:avLst>
           </a:prstGeom>
           <a:solidFill>
-            <a:srgbClr val="F1F5F9"/>
+            <a:srgbClr val="FFFFFF"/>
+          </a:solidFill>
+          <a:ln w="12700">
+            <a:solidFill>
+              <a:srgbClr val="DDE5EE"/>
+            </a:solidFill>
+          </a:ln>
+          <a:effectLst/>
+        </p:spPr>
+        <p:style>
+          <a:lnRef idx="1">
+            <a:schemeClr val="accent1"/>
+          </a:lnRef>
+          <a:fillRef idx="3">
+            <a:schemeClr val="accent1"/>
+          </a:fillRef>
+          <a:effectRef idx="2">
+            <a:schemeClr val="accent1"/>
+          </a:effectRef>
+          <a:fontRef idx="minor">
+            <a:schemeClr val="lt1"/>
+          </a:fontRef>
+        </p:style>
+        <p:txBody>
+          <a:bodyPr rtlCol="0" anchor="ctr"/>
+          <a:lstStyle/>
+          <a:p>
+            <a:pPr algn="ctr"/>
+          </a:p>
+        </p:txBody>
+      </p:sp>
+      <p:sp>
+        <p:nvSpPr>
+          <p:cNvPr id="24" name="Rectangle 23"/>
+          <p:cNvSpPr/>
+          <p:nvPr/>
+        </p:nvSpPr>
+        <p:spPr>
+          <a:xfrm>
+            <a:off x="6219825" y="3495675"/>
+            <a:ext cx="4924425" cy="57150"/>
+          </a:xfrm>
+          <a:prstGeom prst="rect">
+            <a:avLst/>
+          </a:prstGeom>
+          <a:solidFill>
+            <a:srgbClr val="F59E0B"/>
           </a:solidFill>
           <a:ln>
             <a:noFill/>
@@ -23151,14 +23198,60 @@
       </p:sp>
       <p:sp>
         <p:nvSpPr>
-          <p:cNvPr id="22" name="TextBox 21"/>
+          <p:cNvPr id="25" name="Rounded Rectangle 24"/>
+          <p:cNvSpPr/>
+          <p:nvPr/>
+        </p:nvSpPr>
+        <p:spPr>
+          <a:xfrm>
+            <a:off x="6372225" y="3686175"/>
+            <a:ext cx="323850" cy="323850"/>
+          </a:xfrm>
+          <a:prstGeom prst="roundRect">
+            <a:avLst>
+              <a:gd name="adj" fmla="val 8000"/>
+            </a:avLst>
+          </a:prstGeom>
+          <a:solidFill>
+            <a:srgbClr val="F59E0B"/>
+          </a:solidFill>
+          <a:ln>
+            <a:noFill/>
+          </a:ln>
+          <a:effectLst/>
+        </p:spPr>
+        <p:style>
+          <a:lnRef idx="1">
+            <a:schemeClr val="accent1"/>
+          </a:lnRef>
+          <a:fillRef idx="3">
+            <a:schemeClr val="accent1"/>
+          </a:fillRef>
+          <a:effectRef idx="2">
+            <a:schemeClr val="accent1"/>
+          </a:effectRef>
+          <a:fontRef idx="minor">
+            <a:schemeClr val="lt1"/>
+          </a:fontRef>
+        </p:style>
+        <p:txBody>
+          <a:bodyPr rtlCol="0" anchor="ctr"/>
+          <a:lstStyle/>
+          <a:p>
+            <a:pPr algn="ctr"/>
+          </a:p>
+        </p:txBody>
+      </p:sp>
+      <p:sp>
+        <p:nvSpPr>
+          <p:cNvPr id="26" name="TextBox 25"/>
           <p:cNvSpPr txBox="1"/>
           <p:nvPr/>
         </p:nvSpPr>
         <p:spPr>
           <a:xfrm>
-            <a:off x="1066800" y="6019800"/>
-            <a:ext cx="10058400" cy="552450"/>
+            <a:off x="6372225" y="3686175"/>
+            <a:ext cx="323850" cy="323850"/>
           </a:xfrm>
           <a:prstGeom prst="rect">
             <a:avLst/>
@@ -23171,26 +23264,104 @@
           </a:bodyPr>
           <a:lstStyle/>
           <a:p>
+            <a:pPr algn="ctr">
+              <a:lnSpc>
+                <a:spcPct val="100000"/>
+              </a:lnSpc>
+            </a:pPr>
+            <a:r>
+              <a:rPr sz="1200" b="1">
+                <a:solidFill>
+                  <a:srgbClr val="FFFFFF"/>
+                </a:solidFill>
+                <a:latin typeface="PingFang SC"/>
+              </a:rPr>
+              <a:t>04</a:t>
+            </a:r>
+          </a:p>
+        </p:txBody>
+      </p:sp>
+      <p:sp>
+        <p:nvSpPr>
+          <p:cNvPr id="27" name="TextBox 26"/>
+          <p:cNvSpPr txBox="1"/>
+          <p:nvPr/>
+        </p:nvSpPr>
+        <p:spPr>
+          <a:xfrm>
+            <a:off x="6810375" y="3705225"/>
+            <a:ext cx="4181475" cy="285750"/>
+          </a:xfrm>
+          <a:prstGeom prst="rect">
+            <a:avLst/>
+          </a:prstGeom>
+          <a:noFill/>
+        </p:spPr>
+        <p:txBody>
+          <a:bodyPr wrap="square" anchor="ctr">
+            <a:spAutoFit/>
+          </a:bodyPr>
+          <a:lstStyle/>
+          <a:p>
             <a:pPr algn="l">
               <a:lnSpc>
                 <a:spcPct val="100000"/>
               </a:lnSpc>
             </a:pPr>
             <a:r>
-              <a:rPr sz="1250" b="0">
-                <a:solidFill>
-                  <a:srgbClr val="2563EB"/>
+              <a:rPr sz="1400" b="1">
+                <a:solidFill>
+                  <a:srgbClr val="0B1D3A"/>
                 </a:solidFill>
                 <a:latin typeface="PingFang SC"/>
               </a:rPr>
-              <a:t>▶ 数据结构即评测契约</a:t>
-            </a:r>
-          </a:p>
-        </p:txBody>
-      </p:sp>
-      <p:sp>
-        <p:nvSpPr>
-          <p:cNvPr id="23" name="TextBox 22"/>
+              <a:t>平台对照</a:t>
+            </a:r>
+          </a:p>
+        </p:txBody>
+      </p:sp>
+      <p:sp>
+        <p:nvSpPr>
+          <p:cNvPr id="28" name="TextBox 27"/>
+          <p:cNvSpPr txBox="1"/>
+          <p:nvPr/>
+        </p:nvSpPr>
+        <p:spPr>
+          <a:xfrm>
+            <a:off x="6372225" y="4105275"/>
+            <a:ext cx="4619625" cy="781050"/>
+          </a:xfrm>
+          <a:prstGeom prst="rect">
+            <a:avLst/>
+          </a:prstGeom>
+          <a:noFill/>
+        </p:spPr>
+        <p:txBody>
+          <a:bodyPr wrap="square" anchor="ctr">
+            <a:spAutoFit/>
+          </a:bodyPr>
+          <a:lstStyle/>
+          <a:p>
+            <a:pPr algn="l">
+              <a:lnSpc>
+                <a:spcPct val="110000"/>
+              </a:lnSpc>
+            </a:pPr>
+            <a:r>
+              <a:rPr sz="1150" b="0">
+                <a:solidFill>
+                  <a:srgbClr val="475569"/>
+                </a:solidFill>
+                <a:latin typeface="PingFang SC"/>
+              </a:rPr>
+              <a:t>EvalRunner+Trace+Replay 同构</a:t>
+            </a:r>
+          </a:p>
+        </p:txBody>
+      </p:sp>
+      <p:sp>
+        <p:nvSpPr>
+          <p:cNvPr id="29" name="TextBox 28"/>
           <p:cNvSpPr txBox="1"/>
           <p:nvPr/>
         </p:nvSpPr>
@@ -23222,14 +23393,14 @@
                 </a:solidFill>
                 <a:latin typeface="PingFang SC"/>
               </a:rPr>
-              <a:t>第5章 · 29/32</a:t>
-            </a:r>
-          </a:p>
-        </p:txBody>
-      </p:sp>
-      <p:sp>
-        <p:nvSpPr>
-          <p:cNvPr id="24" name="TextBox 23"/>
+              <a:t>第5章 · 29/33</a:t>
+            </a:r>
+          </a:p>
+        </p:txBody>
+      </p:sp>
+      <p:sp>
+        <p:nvSpPr>
+          <p:cNvPr id="30" name="TextBox 29"/>
           <p:cNvSpPr txBox="1"/>
           <p:nvPr/>
         </p:nvSpPr>
@@ -23673,35 +23844,50 @@
                 </a:solidFill>
                 <a:latin typeface="PingFang SC"/>
               </a:rPr>
-              <a:t>测试数量增长轨迹</a:t>
-            </a:r>
-          </a:p>
-        </p:txBody>
-      </p:sp>
-      <p:pic>
-        <p:nvPicPr>
-          <p:cNvPr id="5" name="Picture 4" descr="chart_681270.png"/>
-          <p:cNvPicPr>
-            <a:picLocks noChangeAspect="1"/>
-          </p:cNvPicPr>
-          <p:nvPr/>
-        </p:nvPicPr>
-        <p:blipFill>
-          <a:blip r:embed="rId2"/>
-          <a:stretch>
-            <a:fillRect/>
-          </a:stretch>
-        </p:blipFill>
-        <p:spPr>
-          <a:xfrm>
-            <a:off x="1428750" y="914400"/>
-            <a:ext cx="9334500" cy="4416552"/>
-          </a:xfrm>
-          <a:prstGeom prst="rect">
-            <a:avLst/>
-          </a:prstGeom>
-        </p:spPr>
-      </p:pic>
+              <a:t>EvalRunner 数据结构</a:t>
+            </a:r>
+          </a:p>
+        </p:txBody>
+      </p:sp>
+      <p:sp>
+        <p:nvSpPr>
+          <p:cNvPr id="5" name="TextBox 4"/>
+          <p:cNvSpPr txBox="1"/>
+          <p:nvPr/>
+        </p:nvSpPr>
+        <p:spPr>
+          <a:xfrm>
+            <a:off x="9334500" y="0"/>
+            <a:ext cx="2667000" cy="704850"/>
+          </a:xfrm>
+          <a:prstGeom prst="rect">
+            <a:avLst/>
+          </a:prstGeom>
+          <a:noFill/>
+        </p:spPr>
+        <p:txBody>
+          <a:bodyPr wrap="square" anchor="ctr">
+            <a:spAutoFit/>
+          </a:bodyPr>
+          <a:lstStyle/>
+          <a:p>
+            <a:pPr algn="r">
+              <a:lnSpc>
+                <a:spcPct val="100000"/>
+              </a:lnSpc>
+            </a:pPr>
+            <a:r>
+              <a:rPr sz="1100" b="0">
+                <a:solidFill>
+                  <a:srgbClr val="94A3B8"/>
+                </a:solidFill>
+                <a:latin typeface="PingFang SC"/>
+              </a:rPr>
+              <a:t>第5章</a:t>
+            </a:r>
+          </a:p>
+        </p:txBody>
+      </p:sp>
       <p:sp>
         <p:nvSpPr>
           <p:cNvPr id="6" name="Rounded Rectangle 5"/>
@@ -23710,8 +23896,8 @@
         </p:nvSpPr>
         <p:spPr>
           <a:xfrm>
-            <a:off x="1428750" y="5867400"/>
-            <a:ext cx="9334500" cy="609600"/>
+            <a:off x="876300" y="914400"/>
+            <a:ext cx="10439400" cy="1028700"/>
           </a:xfrm>
           <a:prstGeom prst="roundRect">
             <a:avLst>
@@ -23719,7 +23905,53 @@
             </a:avLst>
           </a:prstGeom>
           <a:solidFill>
-            <a:srgbClr val="F1F5F9"/>
+            <a:srgbClr val="FFFFFF"/>
+          </a:solidFill>
+          <a:ln w="12700">
+            <a:solidFill>
+              <a:srgbClr val="DDE5EE"/>
+            </a:solidFill>
+          </a:ln>
+          <a:effectLst/>
+        </p:spPr>
+        <p:style>
+          <a:lnRef idx="1">
+            <a:schemeClr val="accent1"/>
+          </a:lnRef>
+          <a:fillRef idx="3">
+            <a:schemeClr val="accent1"/>
+          </a:fillRef>
+          <a:effectRef idx="2">
+            <a:schemeClr val="accent1"/>
+          </a:effectRef>
+          <a:fontRef idx="minor">
+            <a:schemeClr val="lt1"/>
+          </a:fontRef>
+        </p:style>
+        <p:txBody>
+          <a:bodyPr rtlCol="0" anchor="ctr"/>
+          <a:lstStyle/>
+          <a:p>
+            <a:pPr algn="ctr"/>
+          </a:p>
+        </p:txBody>
+      </p:sp>
+      <p:sp>
+        <p:nvSpPr>
+          <p:cNvPr id="7" name="Rectangle 6"/>
+          <p:cNvSpPr/>
+          <p:nvPr/>
+        </p:nvSpPr>
+        <p:spPr>
+          <a:xfrm>
+            <a:off x="876300" y="914400"/>
+            <a:ext cx="57150" cy="1028700"/>
+          </a:xfrm>
+          <a:prstGeom prst="rect">
+            <a:avLst/>
+          </a:prstGeom>
+          <a:solidFill>
+            <a:srgbClr val="2563EB"/>
           </a:solidFill>
           <a:ln>
             <a:noFill/>
@@ -23750,14 +23982,60 @@
       </p:sp>
       <p:sp>
         <p:nvSpPr>
-          <p:cNvPr id="7" name="TextBox 6"/>
+          <p:cNvPr id="8" name="Rounded Rectangle 7"/>
+          <p:cNvSpPr/>
+          <p:nvPr/>
+        </p:nvSpPr>
+        <p:spPr>
+          <a:xfrm>
+            <a:off x="1047750" y="1285875"/>
+            <a:ext cx="285750" cy="285750"/>
+          </a:xfrm>
+          <a:prstGeom prst="roundRect">
+            <a:avLst>
+              <a:gd name="adj" fmla="val 8000"/>
+            </a:avLst>
+          </a:prstGeom>
+          <a:solidFill>
+            <a:srgbClr val="2563EB"/>
+          </a:solidFill>
+          <a:ln>
+            <a:noFill/>
+          </a:ln>
+          <a:effectLst/>
+        </p:spPr>
+        <p:style>
+          <a:lnRef idx="1">
+            <a:schemeClr val="accent1"/>
+          </a:lnRef>
+          <a:fillRef idx="3">
+            <a:schemeClr val="accent1"/>
+          </a:fillRef>
+          <a:effectRef idx="2">
+            <a:schemeClr val="accent1"/>
+          </a:effectRef>
+          <a:fontRef idx="minor">
+            <a:schemeClr val="lt1"/>
+          </a:fontRef>
+        </p:style>
+        <p:txBody>
+          <a:bodyPr rtlCol="0" anchor="ctr"/>
+          <a:lstStyle/>
+          <a:p>
+            <a:pPr algn="ctr"/>
+          </a:p>
+        </p:txBody>
+      </p:sp>
+      <p:sp>
+        <p:nvSpPr>
+          <p:cNvPr id="9" name="TextBox 8"/>
           <p:cNvSpPr txBox="1"/>
           <p:nvPr/>
         </p:nvSpPr>
         <p:spPr>
           <a:xfrm>
-            <a:off x="1619250" y="5867400"/>
-            <a:ext cx="8953500" cy="609600"/>
+            <a:off x="1047750" y="1276350"/>
+            <a:ext cx="285750" cy="285750"/>
           </a:xfrm>
           <a:prstGeom prst="rect">
             <a:avLst/>
@@ -23770,26 +24048,582 @@
           </a:bodyPr>
           <a:lstStyle/>
           <a:p>
+            <a:pPr algn="ctr">
+              <a:lnSpc>
+                <a:spcPct val="100000"/>
+              </a:lnSpc>
+            </a:pPr>
+            <a:r>
+              <a:rPr sz="1300" b="1">
+                <a:solidFill>
+                  <a:srgbClr val="FFFFFF"/>
+                </a:solidFill>
+                <a:latin typeface="PingFang SC"/>
+              </a:rPr>
+              <a:t>1</a:t>
+            </a:r>
+          </a:p>
+        </p:txBody>
+      </p:sp>
+      <p:sp>
+        <p:nvSpPr>
+          <p:cNvPr id="10" name="TextBox 9"/>
+          <p:cNvSpPr txBox="1"/>
+          <p:nvPr/>
+        </p:nvSpPr>
+        <p:spPr>
+          <a:xfrm>
+            <a:off x="1485900" y="914400"/>
+            <a:ext cx="9601200" cy="1028700"/>
+          </a:xfrm>
+          <a:prstGeom prst="rect">
+            <a:avLst/>
+          </a:prstGeom>
+          <a:noFill/>
+        </p:spPr>
+        <p:txBody>
+          <a:bodyPr wrap="square" anchor="ctr">
+            <a:spAutoFit/>
+          </a:bodyPr>
+          <a:lstStyle/>
+          <a:p>
             <a:pPr algn="l">
               <a:lnSpc>
+                <a:spcPct val="112000"/>
+              </a:lnSpc>
+            </a:pPr>
+            <a:r>
+              <a:rPr sz="1400" b="1">
+                <a:solidFill>
+                  <a:srgbClr val="475569"/>
+                </a:solidFill>
+                <a:latin typeface="PingFang SC"/>
+              </a:rPr>
+              <a:t>GoldenCase → AgentAnswer → CaseVerdict</a:t>
+            </a:r>
+          </a:p>
+        </p:txBody>
+      </p:sp>
+      <p:sp>
+        <p:nvSpPr>
+          <p:cNvPr id="11" name="Rounded Rectangle 10"/>
+          <p:cNvSpPr/>
+          <p:nvPr/>
+        </p:nvSpPr>
+        <p:spPr>
+          <a:xfrm>
+            <a:off x="876300" y="2114550"/>
+            <a:ext cx="10439400" cy="1028700"/>
+          </a:xfrm>
+          <a:prstGeom prst="roundRect">
+            <a:avLst>
+              <a:gd name="adj" fmla="val 8000"/>
+            </a:avLst>
+          </a:prstGeom>
+          <a:solidFill>
+            <a:srgbClr val="FFFFFF"/>
+          </a:solidFill>
+          <a:ln w="12700">
+            <a:solidFill>
+              <a:srgbClr val="DDE5EE"/>
+            </a:solidFill>
+          </a:ln>
+          <a:effectLst/>
+        </p:spPr>
+        <p:style>
+          <a:lnRef idx="1">
+            <a:schemeClr val="accent1"/>
+          </a:lnRef>
+          <a:fillRef idx="3">
+            <a:schemeClr val="accent1"/>
+          </a:fillRef>
+          <a:effectRef idx="2">
+            <a:schemeClr val="accent1"/>
+          </a:effectRef>
+          <a:fontRef idx="minor">
+            <a:schemeClr val="lt1"/>
+          </a:fontRef>
+        </p:style>
+        <p:txBody>
+          <a:bodyPr rtlCol="0" anchor="ctr"/>
+          <a:lstStyle/>
+          <a:p>
+            <a:pPr algn="ctr"/>
+          </a:p>
+        </p:txBody>
+      </p:sp>
+      <p:sp>
+        <p:nvSpPr>
+          <p:cNvPr id="12" name="Rectangle 11"/>
+          <p:cNvSpPr/>
+          <p:nvPr/>
+        </p:nvSpPr>
+        <p:spPr>
+          <a:xfrm>
+            <a:off x="876300" y="2114550"/>
+            <a:ext cx="57150" cy="1028700"/>
+          </a:xfrm>
+          <a:prstGeom prst="rect">
+            <a:avLst/>
+          </a:prstGeom>
+          <a:solidFill>
+            <a:srgbClr val="14B8A6"/>
+          </a:solidFill>
+          <a:ln>
+            <a:noFill/>
+          </a:ln>
+          <a:effectLst/>
+        </p:spPr>
+        <p:style>
+          <a:lnRef idx="1">
+            <a:schemeClr val="accent1"/>
+          </a:lnRef>
+          <a:fillRef idx="3">
+            <a:schemeClr val="accent1"/>
+          </a:fillRef>
+          <a:effectRef idx="2">
+            <a:schemeClr val="accent1"/>
+          </a:effectRef>
+          <a:fontRef idx="minor">
+            <a:schemeClr val="lt1"/>
+          </a:fontRef>
+        </p:style>
+        <p:txBody>
+          <a:bodyPr rtlCol="0" anchor="ctr"/>
+          <a:lstStyle/>
+          <a:p>
+            <a:pPr algn="ctr"/>
+          </a:p>
+        </p:txBody>
+      </p:sp>
+      <p:sp>
+        <p:nvSpPr>
+          <p:cNvPr id="13" name="Rounded Rectangle 12"/>
+          <p:cNvSpPr/>
+          <p:nvPr/>
+        </p:nvSpPr>
+        <p:spPr>
+          <a:xfrm>
+            <a:off x="1047750" y="2486025"/>
+            <a:ext cx="285750" cy="285750"/>
+          </a:xfrm>
+          <a:prstGeom prst="roundRect">
+            <a:avLst>
+              <a:gd name="adj" fmla="val 8000"/>
+            </a:avLst>
+          </a:prstGeom>
+          <a:solidFill>
+            <a:srgbClr val="14B8A6"/>
+          </a:solidFill>
+          <a:ln>
+            <a:noFill/>
+          </a:ln>
+          <a:effectLst/>
+        </p:spPr>
+        <p:style>
+          <a:lnRef idx="1">
+            <a:schemeClr val="accent1"/>
+          </a:lnRef>
+          <a:fillRef idx="3">
+            <a:schemeClr val="accent1"/>
+          </a:fillRef>
+          <a:effectRef idx="2">
+            <a:schemeClr val="accent1"/>
+          </a:effectRef>
+          <a:fontRef idx="minor">
+            <a:schemeClr val="lt1"/>
+          </a:fontRef>
+        </p:style>
+        <p:txBody>
+          <a:bodyPr rtlCol="0" anchor="ctr"/>
+          <a:lstStyle/>
+          <a:p>
+            <a:pPr algn="ctr"/>
+          </a:p>
+        </p:txBody>
+      </p:sp>
+      <p:sp>
+        <p:nvSpPr>
+          <p:cNvPr id="14" name="TextBox 13"/>
+          <p:cNvSpPr txBox="1"/>
+          <p:nvPr/>
+        </p:nvSpPr>
+        <p:spPr>
+          <a:xfrm>
+            <a:off x="1047750" y="2476500"/>
+            <a:ext cx="285750" cy="285750"/>
+          </a:xfrm>
+          <a:prstGeom prst="rect">
+            <a:avLst/>
+          </a:prstGeom>
+          <a:noFill/>
+        </p:spPr>
+        <p:txBody>
+          <a:bodyPr wrap="square" anchor="ctr">
+            <a:spAutoFit/>
+          </a:bodyPr>
+          <a:lstStyle/>
+          <a:p>
+            <a:pPr algn="ctr">
+              <a:lnSpc>
                 <a:spcPct val="100000"/>
               </a:lnSpc>
             </a:pPr>
             <a:r>
-              <a:rPr sz="1200" b="0">
+              <a:rPr sz="1300" b="1">
+                <a:solidFill>
+                  <a:srgbClr val="FFFFFF"/>
+                </a:solidFill>
+                <a:latin typeface="PingFang SC"/>
+              </a:rPr>
+              <a:t>2</a:t>
+            </a:r>
+          </a:p>
+        </p:txBody>
+      </p:sp>
+      <p:sp>
+        <p:nvSpPr>
+          <p:cNvPr id="15" name="TextBox 14"/>
+          <p:cNvSpPr txBox="1"/>
+          <p:nvPr/>
+        </p:nvSpPr>
+        <p:spPr>
+          <a:xfrm>
+            <a:off x="1485900" y="2114550"/>
+            <a:ext cx="9601200" cy="1028700"/>
+          </a:xfrm>
+          <a:prstGeom prst="rect">
+            <a:avLst/>
+          </a:prstGeom>
+          <a:noFill/>
+        </p:spPr>
+        <p:txBody>
+          <a:bodyPr wrap="square" anchor="ctr">
+            <a:spAutoFit/>
+          </a:bodyPr>
+          <a:lstStyle/>
+          <a:p>
+            <a:pPr algn="l">
+              <a:lnSpc>
+                <a:spcPct val="112000"/>
+              </a:lnSpc>
+            </a:pPr>
+            <a:r>
+              <a:rPr sz="1400" b="1">
+                <a:solidFill>
+                  <a:srgbClr val="475569"/>
+                </a:solidFill>
+                <a:latin typeface="PingFang SC"/>
+              </a:rPr>
+              <a:t>EvalReport:成功率+工具准确率</a:t>
+            </a:r>
+          </a:p>
+        </p:txBody>
+      </p:sp>
+      <p:sp>
+        <p:nvSpPr>
+          <p:cNvPr id="16" name="Rounded Rectangle 15"/>
+          <p:cNvSpPr/>
+          <p:nvPr/>
+        </p:nvSpPr>
+        <p:spPr>
+          <a:xfrm>
+            <a:off x="876300" y="3314700"/>
+            <a:ext cx="10439400" cy="1028700"/>
+          </a:xfrm>
+          <a:prstGeom prst="roundRect">
+            <a:avLst>
+              <a:gd name="adj" fmla="val 8000"/>
+            </a:avLst>
+          </a:prstGeom>
+          <a:solidFill>
+            <a:srgbClr val="FFFFFF"/>
+          </a:solidFill>
+          <a:ln w="12700">
+            <a:solidFill>
+              <a:srgbClr val="DDE5EE"/>
+            </a:solidFill>
+          </a:ln>
+          <a:effectLst/>
+        </p:spPr>
+        <p:style>
+          <a:lnRef idx="1">
+            <a:schemeClr val="accent1"/>
+          </a:lnRef>
+          <a:fillRef idx="3">
+            <a:schemeClr val="accent1"/>
+          </a:fillRef>
+          <a:effectRef idx="2">
+            <a:schemeClr val="accent1"/>
+          </a:effectRef>
+          <a:fontRef idx="minor">
+            <a:schemeClr val="lt1"/>
+          </a:fontRef>
+        </p:style>
+        <p:txBody>
+          <a:bodyPr rtlCol="0" anchor="ctr"/>
+          <a:lstStyle/>
+          <a:p>
+            <a:pPr algn="ctr"/>
+          </a:p>
+        </p:txBody>
+      </p:sp>
+      <p:sp>
+        <p:nvSpPr>
+          <p:cNvPr id="17" name="Rectangle 16"/>
+          <p:cNvSpPr/>
+          <p:nvPr/>
+        </p:nvSpPr>
+        <p:spPr>
+          <a:xfrm>
+            <a:off x="876300" y="3314700"/>
+            <a:ext cx="57150" cy="1028700"/>
+          </a:xfrm>
+          <a:prstGeom prst="rect">
+            <a:avLst/>
+          </a:prstGeom>
+          <a:solidFill>
+            <a:srgbClr val="8B5CF6"/>
+          </a:solidFill>
+          <a:ln>
+            <a:noFill/>
+          </a:ln>
+          <a:effectLst/>
+        </p:spPr>
+        <p:style>
+          <a:lnRef idx="1">
+            <a:schemeClr val="accent1"/>
+          </a:lnRef>
+          <a:fillRef idx="3">
+            <a:schemeClr val="accent1"/>
+          </a:fillRef>
+          <a:effectRef idx="2">
+            <a:schemeClr val="accent1"/>
+          </a:effectRef>
+          <a:fontRef idx="minor">
+            <a:schemeClr val="lt1"/>
+          </a:fontRef>
+        </p:style>
+        <p:txBody>
+          <a:bodyPr rtlCol="0" anchor="ctr"/>
+          <a:lstStyle/>
+          <a:p>
+            <a:pPr algn="ctr"/>
+          </a:p>
+        </p:txBody>
+      </p:sp>
+      <p:sp>
+        <p:nvSpPr>
+          <p:cNvPr id="18" name="Rounded Rectangle 17"/>
+          <p:cNvSpPr/>
+          <p:nvPr/>
+        </p:nvSpPr>
+        <p:spPr>
+          <a:xfrm>
+            <a:off x="1047750" y="3686175"/>
+            <a:ext cx="285750" cy="285750"/>
+          </a:xfrm>
+          <a:prstGeom prst="roundRect">
+            <a:avLst>
+              <a:gd name="adj" fmla="val 8000"/>
+            </a:avLst>
+          </a:prstGeom>
+          <a:solidFill>
+            <a:srgbClr val="8B5CF6"/>
+          </a:solidFill>
+          <a:ln>
+            <a:noFill/>
+          </a:ln>
+          <a:effectLst/>
+        </p:spPr>
+        <p:style>
+          <a:lnRef idx="1">
+            <a:schemeClr val="accent1"/>
+          </a:lnRef>
+          <a:fillRef idx="3">
+            <a:schemeClr val="accent1"/>
+          </a:fillRef>
+          <a:effectRef idx="2">
+            <a:schemeClr val="accent1"/>
+          </a:effectRef>
+          <a:fontRef idx="minor">
+            <a:schemeClr val="lt1"/>
+          </a:fontRef>
+        </p:style>
+        <p:txBody>
+          <a:bodyPr rtlCol="0" anchor="ctr"/>
+          <a:lstStyle/>
+          <a:p>
+            <a:pPr algn="ctr"/>
+          </a:p>
+        </p:txBody>
+      </p:sp>
+      <p:sp>
+        <p:nvSpPr>
+          <p:cNvPr id="19" name="TextBox 18"/>
+          <p:cNvSpPr txBox="1"/>
+          <p:nvPr/>
+        </p:nvSpPr>
+        <p:spPr>
+          <a:xfrm>
+            <a:off x="1047750" y="3676650"/>
+            <a:ext cx="285750" cy="285750"/>
+          </a:xfrm>
+          <a:prstGeom prst="rect">
+            <a:avLst/>
+          </a:prstGeom>
+          <a:noFill/>
+        </p:spPr>
+        <p:txBody>
+          <a:bodyPr wrap="square" anchor="ctr">
+            <a:spAutoFit/>
+          </a:bodyPr>
+          <a:lstStyle/>
+          <a:p>
+            <a:pPr algn="ctr">
+              <a:lnSpc>
+                <a:spcPct val="100000"/>
+              </a:lnSpc>
+            </a:pPr>
+            <a:r>
+              <a:rPr sz="1300" b="1">
+                <a:solidFill>
+                  <a:srgbClr val="FFFFFF"/>
+                </a:solidFill>
+                <a:latin typeface="PingFang SC"/>
+              </a:rPr>
+              <a:t>3</a:t>
+            </a:r>
+          </a:p>
+        </p:txBody>
+      </p:sp>
+      <p:sp>
+        <p:nvSpPr>
+          <p:cNvPr id="20" name="TextBox 19"/>
+          <p:cNvSpPr txBox="1"/>
+          <p:nvPr/>
+        </p:nvSpPr>
+        <p:spPr>
+          <a:xfrm>
+            <a:off x="1485900" y="3314700"/>
+            <a:ext cx="9601200" cy="1028700"/>
+          </a:xfrm>
+          <a:prstGeom prst="rect">
+            <a:avLst/>
+          </a:prstGeom>
+          <a:noFill/>
+        </p:spPr>
+        <p:txBody>
+          <a:bodyPr wrap="square" anchor="ctr">
+            <a:spAutoFit/>
+          </a:bodyPr>
+          <a:lstStyle/>
+          <a:p>
+            <a:pPr algn="l">
+              <a:lnSpc>
+                <a:spcPct val="112000"/>
+              </a:lnSpc>
+            </a:pPr>
+            <a:r>
+              <a:rPr sz="1400" b="1">
+                <a:solidFill>
+                  <a:srgbClr val="475569"/>
+                </a:solidFill>
+                <a:latin typeface="PingFang SC"/>
+              </a:rPr>
+              <a:t>RegressionDelta:improved/regressed</a:t>
+            </a:r>
+          </a:p>
+        </p:txBody>
+      </p:sp>
+      <p:sp>
+        <p:nvSpPr>
+          <p:cNvPr id="21" name="Rounded Rectangle 20"/>
+          <p:cNvSpPr/>
+          <p:nvPr/>
+        </p:nvSpPr>
+        <p:spPr>
+          <a:xfrm>
+            <a:off x="876300" y="6019800"/>
+            <a:ext cx="10439400" cy="514350"/>
+          </a:xfrm>
+          <a:prstGeom prst="roundRect">
+            <a:avLst>
+              <a:gd name="adj" fmla="val 8000"/>
+            </a:avLst>
+          </a:prstGeom>
+          <a:solidFill>
+            <a:srgbClr val="F1F5F9"/>
+          </a:solidFill>
+          <a:ln>
+            <a:noFill/>
+          </a:ln>
+          <a:effectLst/>
+        </p:spPr>
+        <p:style>
+          <a:lnRef idx="1">
+            <a:schemeClr val="accent1"/>
+          </a:lnRef>
+          <a:fillRef idx="3">
+            <a:schemeClr val="accent1"/>
+          </a:fillRef>
+          <a:effectRef idx="2">
+            <a:schemeClr val="accent1"/>
+          </a:effectRef>
+          <a:fontRef idx="minor">
+            <a:schemeClr val="lt1"/>
+          </a:fontRef>
+        </p:style>
+        <p:txBody>
+          <a:bodyPr rtlCol="0" anchor="ctr"/>
+          <a:lstStyle/>
+          <a:p>
+            <a:pPr algn="ctr"/>
+          </a:p>
+        </p:txBody>
+      </p:sp>
+      <p:sp>
+        <p:nvSpPr>
+          <p:cNvPr id="22" name="TextBox 21"/>
+          <p:cNvSpPr txBox="1"/>
+          <p:nvPr/>
+        </p:nvSpPr>
+        <p:spPr>
+          <a:xfrm>
+            <a:off x="1066800" y="6019800"/>
+            <a:ext cx="10058400" cy="552450"/>
+          </a:xfrm>
+          <a:prstGeom prst="rect">
+            <a:avLst/>
+          </a:prstGeom>
+          <a:noFill/>
+        </p:spPr>
+        <p:txBody>
+          <a:bodyPr wrap="square" anchor="ctr">
+            <a:spAutoFit/>
+          </a:bodyPr>
+          <a:lstStyle/>
+          <a:p>
+            <a:pPr algn="l">
+              <a:lnSpc>
+                <a:spcPct val="100000"/>
+              </a:lnSpc>
+            </a:pPr>
+            <a:r>
+              <a:rPr sz="1250" b="0">
                 <a:solidFill>
                   <a:srgbClr val="2563EB"/>
                 </a:solidFill>
                 <a:latin typeface="PingFang SC"/>
               </a:rPr>
-              <a:t>💡 覆盖率门禁 80% 持续绿:回归是迭代底气</a:t>
-            </a:r>
-          </a:p>
-        </p:txBody>
-      </p:sp>
-      <p:sp>
-        <p:nvSpPr>
-          <p:cNvPr id="8" name="TextBox 7"/>
+              <a:t>▶ 数据结构即评测契约</a:t>
+            </a:r>
+          </a:p>
+        </p:txBody>
+      </p:sp>
+      <p:sp>
+        <p:nvSpPr>
+          <p:cNvPr id="23" name="TextBox 22"/>
           <p:cNvSpPr txBox="1"/>
           <p:nvPr/>
         </p:nvSpPr>
@@ -23821,14 +24655,14 @@
                 </a:solidFill>
                 <a:latin typeface="PingFang SC"/>
               </a:rPr>
-              <a:t>第5章 · 30/32</a:t>
-            </a:r>
-          </a:p>
-        </p:txBody>
-      </p:sp>
-      <p:sp>
-        <p:nvSpPr>
-          <p:cNvPr id="9" name="TextBox 8"/>
+              <a:t>第5章 · 30/33</a:t>
+            </a:r>
+          </a:p>
+        </p:txBody>
+      </p:sp>
+      <p:sp>
+        <p:nvSpPr>
+          <p:cNvPr id="24" name="TextBox 23"/>
           <p:cNvSpPr txBox="1"/>
           <p:nvPr/>
         </p:nvSpPr>
@@ -23892,7 +24726,7 @@
         <p:spPr>
           <a:xfrm>
             <a:off x="0" y="0"/>
-            <a:ext cx="12192000" cy="6858000"/>
+            <a:ext cx="12192000" cy="704850"/>
           </a:xfrm>
           <a:prstGeom prst="rect">
             <a:avLst/>
@@ -23936,13 +24770,13 @@
         <p:spPr>
           <a:xfrm>
             <a:off x="0" y="0"/>
-            <a:ext cx="12192000" cy="609600"/>
-          </a:xfrm>
-          <a:prstGeom prst="rect">
-            <a:avLst/>
-          </a:prstGeom>
-          <a:solidFill>
-            <a:srgbClr val="142A4C"/>
+            <a:ext cx="76200" cy="704850"/>
+          </a:xfrm>
+          <a:prstGeom prst="rect">
+            <a:avLst/>
+          </a:prstGeom>
+          <a:solidFill>
+            <a:srgbClr val="F59E0B"/>
           </a:solidFill>
           <a:ln>
             <a:noFill/>
@@ -23980,7 +24814,7 @@
         <p:spPr>
           <a:xfrm>
             <a:off x="266700" y="0"/>
-            <a:ext cx="11430000" cy="609600"/>
+            <a:ext cx="10287000" cy="704850"/>
           </a:xfrm>
           <a:prstGeom prst="rect">
             <a:avLst/>
@@ -23999,20 +24833,20 @@
               </a:lnSpc>
             </a:pPr>
             <a:r>
-              <a:rPr sz="1600" b="1">
-                <a:solidFill>
-                  <a:srgbClr val="F59E0B"/>
+              <a:rPr sz="2000" b="1">
+                <a:solidFill>
+                  <a:srgbClr val="FFFFFF"/>
                 </a:solidFill>
                 <a:latin typeface="PingFang SC"/>
               </a:rPr>
-              <a:t>回归双清单 · src/agent_platform/eval/evaluator.py:116-121</a:t>
+              <a:t>测试数量增长轨迹</a:t>
             </a:r>
           </a:p>
         </p:txBody>
       </p:sp>
       <p:pic>
         <p:nvPicPr>
-          <p:cNvPr id="5" name="Picture 4" descr="code_0.png"/>
+          <p:cNvPr id="5" name="Picture 4" descr="chart_338991.png"/>
           <p:cNvPicPr>
             <a:picLocks noChangeAspect="1"/>
           </p:cNvPicPr>
@@ -24026,8 +24860,8 @@
         </p:blipFill>
         <p:spPr>
           <a:xfrm>
-            <a:off x="365760" y="762000"/>
-            <a:ext cx="11460480" cy="1432560"/>
+            <a:off x="1428750" y="914400"/>
+            <a:ext cx="9334500" cy="4416552"/>
           </a:xfrm>
           <a:prstGeom prst="rect">
             <a:avLst/>
@@ -24036,7 +24870,92 @@
       </p:pic>
       <p:sp>
         <p:nvSpPr>
-          <p:cNvPr id="6" name="TextBox 5"/>
+          <p:cNvPr id="6" name="Rounded Rectangle 5"/>
+          <p:cNvSpPr/>
+          <p:nvPr/>
+        </p:nvSpPr>
+        <p:spPr>
+          <a:xfrm>
+            <a:off x="1428750" y="5867400"/>
+            <a:ext cx="9334500" cy="609600"/>
+          </a:xfrm>
+          <a:prstGeom prst="roundRect">
+            <a:avLst>
+              <a:gd name="adj" fmla="val 8000"/>
+            </a:avLst>
+          </a:prstGeom>
+          <a:solidFill>
+            <a:srgbClr val="F1F5F9"/>
+          </a:solidFill>
+          <a:ln>
+            <a:noFill/>
+          </a:ln>
+          <a:effectLst/>
+        </p:spPr>
+        <p:style>
+          <a:lnRef idx="1">
+            <a:schemeClr val="accent1"/>
+          </a:lnRef>
+          <a:fillRef idx="3">
+            <a:schemeClr val="accent1"/>
+          </a:fillRef>
+          <a:effectRef idx="2">
+            <a:schemeClr val="accent1"/>
+          </a:effectRef>
+          <a:fontRef idx="minor">
+            <a:schemeClr val="lt1"/>
+          </a:fontRef>
+        </p:style>
+        <p:txBody>
+          <a:bodyPr rtlCol="0" anchor="ctr"/>
+          <a:lstStyle/>
+          <a:p>
+            <a:pPr algn="ctr"/>
+          </a:p>
+        </p:txBody>
+      </p:sp>
+      <p:sp>
+        <p:nvSpPr>
+          <p:cNvPr id="7" name="TextBox 6"/>
+          <p:cNvSpPr txBox="1"/>
+          <p:nvPr/>
+        </p:nvSpPr>
+        <p:spPr>
+          <a:xfrm>
+            <a:off x="1619250" y="5867400"/>
+            <a:ext cx="8953500" cy="609600"/>
+          </a:xfrm>
+          <a:prstGeom prst="rect">
+            <a:avLst/>
+          </a:prstGeom>
+          <a:noFill/>
+        </p:spPr>
+        <p:txBody>
+          <a:bodyPr wrap="square" anchor="ctr">
+            <a:spAutoFit/>
+          </a:bodyPr>
+          <a:lstStyle/>
+          <a:p>
+            <a:pPr algn="l">
+              <a:lnSpc>
+                <a:spcPct val="100000"/>
+              </a:lnSpc>
+            </a:pPr>
+            <a:r>
+              <a:rPr sz="1200" b="0">
+                <a:solidFill>
+                  <a:srgbClr val="2563EB"/>
+                </a:solidFill>
+                <a:latin typeface="PingFang SC"/>
+              </a:rPr>
+              <a:t>💡 覆盖率门禁 80% 持续绿:回归是迭代底气</a:t>
+            </a:r>
+          </a:p>
+        </p:txBody>
+      </p:sp>
+      <p:sp>
+        <p:nvSpPr>
+          <p:cNvPr id="8" name="TextBox 7"/>
           <p:cNvSpPr txBox="1"/>
           <p:nvPr/>
         </p:nvSpPr>
@@ -24068,14 +24987,14 @@
                 </a:solidFill>
                 <a:latin typeface="PingFang SC"/>
               </a:rPr>
-              <a:t>第5章 · 31/32</a:t>
-            </a:r>
-          </a:p>
-        </p:txBody>
-      </p:sp>
-      <p:sp>
-        <p:nvSpPr>
-          <p:cNvPr id="7" name="TextBox 6"/>
+              <a:t>第5章 · 31/33</a:t>
+            </a:r>
+          </a:p>
+        </p:txBody>
+      </p:sp>
+      <p:sp>
+        <p:nvSpPr>
+          <p:cNvPr id="9" name="TextBox 8"/>
           <p:cNvSpPr txBox="1"/>
           <p:nvPr/>
         </p:nvSpPr>
@@ -24139,6 +25058,253 @@
         <p:spPr>
           <a:xfrm>
             <a:off x="0" y="0"/>
+            <a:ext cx="12192000" cy="6858000"/>
+          </a:xfrm>
+          <a:prstGeom prst="rect">
+            <a:avLst/>
+          </a:prstGeom>
+          <a:solidFill>
+            <a:srgbClr val="0B1D3A"/>
+          </a:solidFill>
+          <a:ln>
+            <a:noFill/>
+          </a:ln>
+          <a:effectLst/>
+        </p:spPr>
+        <p:style>
+          <a:lnRef idx="1">
+            <a:schemeClr val="accent1"/>
+          </a:lnRef>
+          <a:fillRef idx="3">
+            <a:schemeClr val="accent1"/>
+          </a:fillRef>
+          <a:effectRef idx="2">
+            <a:schemeClr val="accent1"/>
+          </a:effectRef>
+          <a:fontRef idx="minor">
+            <a:schemeClr val="lt1"/>
+          </a:fontRef>
+        </p:style>
+        <p:txBody>
+          <a:bodyPr rtlCol="0" anchor="ctr"/>
+          <a:lstStyle/>
+          <a:p>
+            <a:pPr algn="ctr"/>
+          </a:p>
+        </p:txBody>
+      </p:sp>
+      <p:sp>
+        <p:nvSpPr>
+          <p:cNvPr id="3" name="Rectangle 2"/>
+          <p:cNvSpPr/>
+          <p:nvPr/>
+        </p:nvSpPr>
+        <p:spPr>
+          <a:xfrm>
+            <a:off x="0" y="0"/>
+            <a:ext cx="12192000" cy="609600"/>
+          </a:xfrm>
+          <a:prstGeom prst="rect">
+            <a:avLst/>
+          </a:prstGeom>
+          <a:solidFill>
+            <a:srgbClr val="142A4C"/>
+          </a:solidFill>
+          <a:ln>
+            <a:noFill/>
+          </a:ln>
+          <a:effectLst/>
+        </p:spPr>
+        <p:style>
+          <a:lnRef idx="1">
+            <a:schemeClr val="accent1"/>
+          </a:lnRef>
+          <a:fillRef idx="3">
+            <a:schemeClr val="accent1"/>
+          </a:fillRef>
+          <a:effectRef idx="2">
+            <a:schemeClr val="accent1"/>
+          </a:effectRef>
+          <a:fontRef idx="minor">
+            <a:schemeClr val="lt1"/>
+          </a:fontRef>
+        </p:style>
+        <p:txBody>
+          <a:bodyPr rtlCol="0" anchor="ctr"/>
+          <a:lstStyle/>
+          <a:p>
+            <a:pPr algn="ctr"/>
+          </a:p>
+        </p:txBody>
+      </p:sp>
+      <p:sp>
+        <p:nvSpPr>
+          <p:cNvPr id="4" name="TextBox 3"/>
+          <p:cNvSpPr txBox="1"/>
+          <p:nvPr/>
+        </p:nvSpPr>
+        <p:spPr>
+          <a:xfrm>
+            <a:off x="266700" y="0"/>
+            <a:ext cx="11430000" cy="609600"/>
+          </a:xfrm>
+          <a:prstGeom prst="rect">
+            <a:avLst/>
+          </a:prstGeom>
+          <a:noFill/>
+        </p:spPr>
+        <p:txBody>
+          <a:bodyPr wrap="square" anchor="ctr">
+            <a:spAutoFit/>
+          </a:bodyPr>
+          <a:lstStyle/>
+          <a:p>
+            <a:pPr algn="l">
+              <a:lnSpc>
+                <a:spcPct val="100000"/>
+              </a:lnSpc>
+            </a:pPr>
+            <a:r>
+              <a:rPr sz="1600" b="1">
+                <a:solidFill>
+                  <a:srgbClr val="F59E0B"/>
+                </a:solidFill>
+                <a:latin typeface="PingFang SC"/>
+              </a:rPr>
+              <a:t>回归双清单 · src/agent_platform/eval/evaluator.py:116-121</a:t>
+            </a:r>
+          </a:p>
+        </p:txBody>
+      </p:sp>
+      <p:pic>
+        <p:nvPicPr>
+          <p:cNvPr id="5" name="Picture 4" descr="code_0.png"/>
+          <p:cNvPicPr>
+            <a:picLocks noChangeAspect="1"/>
+          </p:cNvPicPr>
+          <p:nvPr/>
+        </p:nvPicPr>
+        <p:blipFill>
+          <a:blip r:embed="rId2"/>
+          <a:stretch>
+            <a:fillRect/>
+          </a:stretch>
+        </p:blipFill>
+        <p:spPr>
+          <a:xfrm>
+            <a:off x="365760" y="762000"/>
+            <a:ext cx="11460480" cy="1432560"/>
+          </a:xfrm>
+          <a:prstGeom prst="rect">
+            <a:avLst/>
+          </a:prstGeom>
+        </p:spPr>
+      </p:pic>
+      <p:sp>
+        <p:nvSpPr>
+          <p:cNvPr id="6" name="TextBox 5"/>
+          <p:cNvSpPr txBox="1"/>
+          <p:nvPr/>
+        </p:nvSpPr>
+        <p:spPr>
+          <a:xfrm>
+            <a:off x="10287000" y="6534150"/>
+            <a:ext cx="1619250" cy="266700"/>
+          </a:xfrm>
+          <a:prstGeom prst="rect">
+            <a:avLst/>
+          </a:prstGeom>
+          <a:noFill/>
+        </p:spPr>
+        <p:txBody>
+          <a:bodyPr wrap="square" anchor="ctr">
+            <a:spAutoFit/>
+          </a:bodyPr>
+          <a:lstStyle/>
+          <a:p>
+            <a:pPr algn="r">
+              <a:lnSpc>
+                <a:spcPct val="100000"/>
+              </a:lnSpc>
+            </a:pPr>
+            <a:r>
+              <a:rPr sz="900" b="0">
+                <a:solidFill>
+                  <a:srgbClr val="94A3B8"/>
+                </a:solidFill>
+                <a:latin typeface="PingFang SC"/>
+              </a:rPr>
+              <a:t>第5章 · 32/33</a:t>
+            </a:r>
+          </a:p>
+        </p:txBody>
+      </p:sp>
+      <p:sp>
+        <p:nvSpPr>
+          <p:cNvPr id="7" name="TextBox 6"/>
+          <p:cNvSpPr txBox="1"/>
+          <p:nvPr/>
+        </p:nvSpPr>
+        <p:spPr>
+          <a:xfrm>
+            <a:off x="609600" y="6534150"/>
+            <a:ext cx="5334000" cy="266700"/>
+          </a:xfrm>
+          <a:prstGeom prst="rect">
+            <a:avLst/>
+          </a:prstGeom>
+          <a:noFill/>
+        </p:spPr>
+        <p:txBody>
+          <a:bodyPr wrap="square" anchor="ctr">
+            <a:spAutoFit/>
+          </a:bodyPr>
+          <a:lstStyle/>
+          <a:p>
+            <a:pPr algn="l">
+              <a:lnSpc>
+                <a:spcPct val="100000"/>
+              </a:lnSpc>
+            </a:pPr>
+            <a:r>
+              <a:rPr sz="900" b="0">
+                <a:solidFill>
+                  <a:srgbClr val="94A3B8"/>
+                </a:solidFill>
+                <a:latin typeface="PingFang SC"/>
+              </a:rPr>
+              <a:t>教研室内部课件 · 讲次 04 · 5-4 · Agent Eval:核</a:t>
+            </a:r>
+          </a:p>
+        </p:txBody>
+      </p:sp>
+    </p:spTree>
+  </p:cSld>
+  <p:clrMapOvr>
+    <a:masterClrMapping/>
+  </p:clrMapOvr>
+</p:sld>
+</file>
+
+<file path=ppt/slides/slide33.xml><?xml version="1.0" encoding="utf-8"?>
+<p:sld xmlns:a="http://schemas.openxmlformats.org/drawingml/2006/main" xmlns:p="http://schemas.openxmlformats.org/presentationml/2006/main" xmlns:r="http://schemas.openxmlformats.org/officeDocument/2006/relationships">
+  <p:cSld>
+    <p:spTree>
+      <p:nvGrpSpPr>
+        <p:cNvPr id="1" name=""/>
+        <p:cNvGrpSpPr/>
+        <p:nvPr/>
+      </p:nvGrpSpPr>
+      <p:grpSpPr/>
+      <p:sp>
+        <p:nvSpPr>
+          <p:cNvPr id="2" name="Rectangle 1"/>
+          <p:cNvSpPr/>
+          <p:nvPr/>
+        </p:nvSpPr>
+        <p:spPr>
+          <a:xfrm>
+            <a:off x="0" y="0"/>
             <a:ext cx="12192000" cy="704850"/>
           </a:xfrm>
           <a:prstGeom prst="rect">
@@ -24919,7 +26085,7 @@
                 </a:solidFill>
                 <a:latin typeface="PingFang SC"/>
               </a:rPr>
-              <a:t>第5章 · 32/32</a:t>
+              <a:t>第5章 · 33/33</a:t>
             </a:r>
           </a:p>
         </p:txBody>
@@ -26130,7 +27296,7 @@
                 </a:solidFill>
                 <a:latin typeface="PingFang SC"/>
               </a:rPr>
-              <a:t>第5章 · 4/32</a:t>
+              <a:t>第5章 · 4/33</a:t>
             </a:r>
           </a:p>
         </p:txBody>
@@ -27125,7 +28291,7 @@
                 </a:solidFill>
                 <a:latin typeface="PingFang SC"/>
               </a:rPr>
-              <a:t>第5章 · 5/32</a:t>
+              <a:t>第5章 · 5/33</a:t>
             </a:r>
           </a:p>
         </p:txBody>
@@ -27316,7 +28482,7 @@
       </p:sp>
       <p:pic>
         <p:nvPicPr>
-          <p:cNvPr id="5" name="Picture 4" descr="chart_757954.png"/>
+          <p:cNvPr id="5" name="Picture 4" descr="chart_298438.png"/>
           <p:cNvPicPr>
             <a:picLocks noChangeAspect="1"/>
           </p:cNvPicPr>
@@ -27457,7 +28623,7 @@
                 </a:solidFill>
                 <a:latin typeface="PingFang SC"/>
               </a:rPr>
-              <a:t>第5章 · 6/32</a:t>
+              <a:t>第5章 · 6/33</a:t>
             </a:r>
           </a:p>
         </p:txBody>
@@ -28452,7 +29618,7 @@
                 </a:solidFill>
                 <a:latin typeface="PingFang SC"/>
               </a:rPr>
-              <a:t>第5章 · 7/32</a:t>
+              <a:t>第5章 · 7/33</a:t>
             </a:r>
           </a:p>
         </p:txBody>
@@ -28643,46 +29809,7 @@
       </p:sp>
       <p:sp>
         <p:nvSpPr>
-          <p:cNvPr id="5" name="TextBox 4"/>
-          <p:cNvSpPr txBox="1"/>
-          <p:nvPr/>
-        </p:nvSpPr>
-        <p:spPr>
-          <a:xfrm>
-            <a:off x="9334500" y="0"/>
-            <a:ext cx="2667000" cy="704850"/>
-          </a:xfrm>
-          <a:prstGeom prst="rect">
-            <a:avLst/>
-          </a:prstGeom>
-          <a:noFill/>
-        </p:spPr>
-        <p:txBody>
-          <a:bodyPr wrap="square" anchor="ctr">
-            <a:spAutoFit/>
-          </a:bodyPr>
-          <a:lstStyle/>
-          <a:p>
-            <a:pPr algn="r">
-              <a:lnSpc>
-                <a:spcPct val="100000"/>
-              </a:lnSpc>
-            </a:pPr>
-            <a:r>
-              <a:rPr sz="1100" b="0">
-                <a:solidFill>
-                  <a:srgbClr val="94A3B8"/>
-                </a:solidFill>
-                <a:latin typeface="PingFang SC"/>
-              </a:rPr>
-              <a:t>20^题^起步规模;14^项^指标全景;2^清单^improved/regressed;1^红线^幻觉率|随故障增长:每修复+1 用例</a:t>
-            </a:r>
-          </a:p>
-        </p:txBody>
-      </p:sp>
-      <p:sp>
-        <p:nvSpPr>
-          <p:cNvPr id="6" name="Rounded Rectangle 5"/>
+          <p:cNvPr id="5" name="Rounded Rectangle 4"/>
           <p:cNvSpPr/>
           <p:nvPr/>
         </p:nvSpPr>
@@ -28730,7 +29857,7 @@
       </p:sp>
       <p:sp>
         <p:nvSpPr>
-          <p:cNvPr id="7" name="Rectangle 6"/>
+          <p:cNvPr id="6" name="Rectangle 5"/>
           <p:cNvSpPr/>
           <p:nvPr/>
         </p:nvSpPr>
@@ -28774,14 +29901,53 @@
       </p:sp>
       <p:sp>
         <p:nvSpPr>
+          <p:cNvPr id="7" name="TextBox 6"/>
+          <p:cNvSpPr txBox="1"/>
+          <p:nvPr/>
+        </p:nvSpPr>
+        <p:spPr>
+          <a:xfrm>
+            <a:off x="1047750" y="2286000"/>
+            <a:ext cx="2309812" cy="1047750"/>
+          </a:xfrm>
+          <a:prstGeom prst="rect">
+            <a:avLst/>
+          </a:prstGeom>
+          <a:noFill/>
+        </p:spPr>
+        <p:txBody>
+          <a:bodyPr wrap="square" anchor="ctr">
+            <a:spAutoFit/>
+          </a:bodyPr>
+          <a:lstStyle/>
+          <a:p>
+            <a:pPr algn="ctr">
+              <a:lnSpc>
+                <a:spcPct val="100000"/>
+              </a:lnSpc>
+            </a:pPr>
+            <a:r>
+              <a:rPr sz="4000" b="1">
+                <a:solidFill>
+                  <a:srgbClr val="2563EB"/>
+                </a:solidFill>
+                <a:latin typeface="PingFang SC"/>
+              </a:rPr>
+              <a:t>20</a:t>
+            </a:r>
+          </a:p>
+        </p:txBody>
+      </p:sp>
+      <p:sp>
+        <p:nvSpPr>
           <p:cNvPr id="8" name="TextBox 7"/>
           <p:cNvSpPr txBox="1"/>
           <p:nvPr/>
         </p:nvSpPr>
         <p:spPr>
           <a:xfrm>
-            <a:off x="1047750" y="2286000"/>
-            <a:ext cx="2309812" cy="1047750"/>
+            <a:off x="1047750" y="3333750"/>
+            <a:ext cx="2309812" cy="323850"/>
           </a:xfrm>
           <a:prstGeom prst="rect">
             <a:avLst/>
@@ -28800,13 +29966,13 @@
               </a:lnSpc>
             </a:pPr>
             <a:r>
-              <a:rPr sz="4000" b="1">
-                <a:solidFill>
-                  <a:srgbClr val="2563EB"/>
+              <a:rPr sz="1300" b="0">
+                <a:solidFill>
+                  <a:srgbClr val="94A3B8"/>
                 </a:solidFill>
                 <a:latin typeface="PingFang SC"/>
               </a:rPr>
-              <a:t>20</a:t>
+              <a:t>题</a:t>
             </a:r>
           </a:p>
         </p:txBody>
@@ -28819,8 +29985,8 @@
         </p:nvSpPr>
         <p:spPr>
           <a:xfrm>
-            <a:off x="1047750" y="3333750"/>
-            <a:ext cx="2309812" cy="323850"/>
+            <a:off x="1200150" y="4057650"/>
+            <a:ext cx="2005012" cy="571500"/>
           </a:xfrm>
           <a:prstGeom prst="rect">
             <a:avLst/>
@@ -28839,51 +30005,12 @@
               </a:lnSpc>
             </a:pPr>
             <a:r>
-              <a:rPr sz="1300" b="0">
-                <a:solidFill>
-                  <a:srgbClr val="94A3B8"/>
+              <a:rPr sz="1300" b="1">
+                <a:solidFill>
+                  <a:srgbClr val="475569"/>
                 </a:solidFill>
                 <a:latin typeface="PingFang SC"/>
               </a:rPr>
-              <a:t>题</a:t>
-            </a:r>
-          </a:p>
-        </p:txBody>
-      </p:sp>
-      <p:sp>
-        <p:nvSpPr>
-          <p:cNvPr id="10" name="TextBox 9"/>
-          <p:cNvSpPr txBox="1"/>
-          <p:nvPr/>
-        </p:nvSpPr>
-        <p:spPr>
-          <a:xfrm>
-            <a:off x="1200150" y="4057650"/>
-            <a:ext cx="2005012" cy="571500"/>
-          </a:xfrm>
-          <a:prstGeom prst="rect">
-            <a:avLst/>
-          </a:prstGeom>
-          <a:noFill/>
-        </p:spPr>
-        <p:txBody>
-          <a:bodyPr wrap="square" anchor="ctr">
-            <a:spAutoFit/>
-          </a:bodyPr>
-          <a:lstStyle/>
-          <a:p>
-            <a:pPr algn="ctr">
-              <a:lnSpc>
-                <a:spcPct val="100000"/>
-              </a:lnSpc>
-            </a:pPr>
-            <a:r>
-              <a:rPr sz="1300" b="1">
-                <a:solidFill>
-                  <a:srgbClr val="475569"/>
-                </a:solidFill>
-                <a:latin typeface="PingFang SC"/>
-              </a:rPr>
               <a:t>起步规模</a:t>
             </a:r>
           </a:p>
@@ -28891,7 +30018,7 @@
       </p:sp>
       <p:sp>
         <p:nvSpPr>
-          <p:cNvPr id="11" name="Rounded Rectangle 10"/>
+          <p:cNvPr id="10" name="Rounded Rectangle 9"/>
           <p:cNvSpPr/>
           <p:nvPr/>
         </p:nvSpPr>
@@ -28939,7 +30066,7 @@
       </p:sp>
       <p:sp>
         <p:nvSpPr>
-          <p:cNvPr id="12" name="Rectangle 11"/>
+          <p:cNvPr id="11" name="Rectangle 10"/>
           <p:cNvSpPr/>
           <p:nvPr/>
         </p:nvSpPr>
@@ -28983,14 +30110,53 @@
       </p:sp>
       <p:sp>
         <p:nvSpPr>
+          <p:cNvPr id="12" name="TextBox 11"/>
+          <p:cNvSpPr txBox="1"/>
+          <p:nvPr/>
+        </p:nvSpPr>
+        <p:spPr>
+          <a:xfrm>
+            <a:off x="3643312" y="2286000"/>
+            <a:ext cx="2309812" cy="1047750"/>
+          </a:xfrm>
+          <a:prstGeom prst="rect">
+            <a:avLst/>
+          </a:prstGeom>
+          <a:noFill/>
+        </p:spPr>
+        <p:txBody>
+          <a:bodyPr wrap="square" anchor="ctr">
+            <a:spAutoFit/>
+          </a:bodyPr>
+          <a:lstStyle/>
+          <a:p>
+            <a:pPr algn="ctr">
+              <a:lnSpc>
+                <a:spcPct val="100000"/>
+              </a:lnSpc>
+            </a:pPr>
+            <a:r>
+              <a:rPr sz="4000" b="1">
+                <a:solidFill>
+                  <a:srgbClr val="14B8A6"/>
+                </a:solidFill>
+                <a:latin typeface="PingFang SC"/>
+              </a:rPr>
+              <a:t>14</a:t>
+            </a:r>
+          </a:p>
+        </p:txBody>
+      </p:sp>
+      <p:sp>
+        <p:nvSpPr>
           <p:cNvPr id="13" name="TextBox 12"/>
           <p:cNvSpPr txBox="1"/>
           <p:nvPr/>
         </p:nvSpPr>
         <p:spPr>
           <a:xfrm>
-            <a:off x="3643312" y="2286000"/>
-            <a:ext cx="2309812" cy="1047750"/>
+            <a:off x="3643312" y="3333750"/>
+            <a:ext cx="2309812" cy="323850"/>
           </a:xfrm>
           <a:prstGeom prst="rect">
             <a:avLst/>
@@ -29009,13 +30175,13 @@
               </a:lnSpc>
             </a:pPr>
             <a:r>
-              <a:rPr sz="4000" b="1">
-                <a:solidFill>
-                  <a:srgbClr val="14B8A6"/>
+              <a:rPr sz="1300" b="0">
+                <a:solidFill>
+                  <a:srgbClr val="94A3B8"/>
                 </a:solidFill>
                 <a:latin typeface="PingFang SC"/>
               </a:rPr>
-              <a:t>14</a:t>
+              <a:t>项</a:t>
             </a:r>
           </a:p>
         </p:txBody>
@@ -29028,8 +30194,8 @@
         </p:nvSpPr>
         <p:spPr>
           <a:xfrm>
-            <a:off x="3643312" y="3333750"/>
-            <a:ext cx="2309812" cy="323850"/>
+            <a:off x="3795712" y="4057650"/>
+            <a:ext cx="2005012" cy="571500"/>
           </a:xfrm>
           <a:prstGeom prst="rect">
             <a:avLst/>
@@ -29048,51 +30214,12 @@
               </a:lnSpc>
             </a:pPr>
             <a:r>
-              <a:rPr sz="1300" b="0">
-                <a:solidFill>
-                  <a:srgbClr val="94A3B8"/>
+              <a:rPr sz="1300" b="1">
+                <a:solidFill>
+                  <a:srgbClr val="475569"/>
                 </a:solidFill>
                 <a:latin typeface="PingFang SC"/>
               </a:rPr>
-              <a:t>项</a:t>
-            </a:r>
-          </a:p>
-        </p:txBody>
-      </p:sp>
-      <p:sp>
-        <p:nvSpPr>
-          <p:cNvPr id="15" name="TextBox 14"/>
-          <p:cNvSpPr txBox="1"/>
-          <p:nvPr/>
-        </p:nvSpPr>
-        <p:spPr>
-          <a:xfrm>
-            <a:off x="3795712" y="4057650"/>
-            <a:ext cx="2005012" cy="571500"/>
-          </a:xfrm>
-          <a:prstGeom prst="rect">
-            <a:avLst/>
-          </a:prstGeom>
-          <a:noFill/>
-        </p:spPr>
-        <p:txBody>
-          <a:bodyPr wrap="square" anchor="ctr">
-            <a:spAutoFit/>
-          </a:bodyPr>
-          <a:lstStyle/>
-          <a:p>
-            <a:pPr algn="ctr">
-              <a:lnSpc>
-                <a:spcPct val="100000"/>
-              </a:lnSpc>
-            </a:pPr>
-            <a:r>
-              <a:rPr sz="1300" b="1">
-                <a:solidFill>
-                  <a:srgbClr val="475569"/>
-                </a:solidFill>
-                <a:latin typeface="PingFang SC"/>
-              </a:rPr>
               <a:t>指标全景</a:t>
             </a:r>
           </a:p>
@@ -29100,7 +30227,7 @@
       </p:sp>
       <p:sp>
         <p:nvSpPr>
-          <p:cNvPr id="16" name="Rounded Rectangle 15"/>
+          <p:cNvPr id="15" name="Rounded Rectangle 14"/>
           <p:cNvSpPr/>
           <p:nvPr/>
         </p:nvSpPr>
@@ -29148,7 +30275,7 @@
       </p:sp>
       <p:sp>
         <p:nvSpPr>
-          <p:cNvPr id="17" name="Rectangle 16"/>
+          <p:cNvPr id="16" name="Rectangle 15"/>
           <p:cNvSpPr/>
           <p:nvPr/>
         </p:nvSpPr>
@@ -29192,14 +30319,53 @@
       </p:sp>
       <p:sp>
         <p:nvSpPr>
+          <p:cNvPr id="17" name="TextBox 16"/>
+          <p:cNvSpPr txBox="1"/>
+          <p:nvPr/>
+        </p:nvSpPr>
+        <p:spPr>
+          <a:xfrm>
+            <a:off x="6238874" y="2286000"/>
+            <a:ext cx="2309812" cy="1047750"/>
+          </a:xfrm>
+          <a:prstGeom prst="rect">
+            <a:avLst/>
+          </a:prstGeom>
+          <a:noFill/>
+        </p:spPr>
+        <p:txBody>
+          <a:bodyPr wrap="square" anchor="ctr">
+            <a:spAutoFit/>
+          </a:bodyPr>
+          <a:lstStyle/>
+          <a:p>
+            <a:pPr algn="ctr">
+              <a:lnSpc>
+                <a:spcPct val="100000"/>
+              </a:lnSpc>
+            </a:pPr>
+            <a:r>
+              <a:rPr sz="4000" b="1">
+                <a:solidFill>
+                  <a:srgbClr val="8B5CF6"/>
+                </a:solidFill>
+                <a:latin typeface="PingFang SC"/>
+              </a:rPr>
+              <a:t>2</a:t>
+            </a:r>
+          </a:p>
+        </p:txBody>
+      </p:sp>
+      <p:sp>
+        <p:nvSpPr>
           <p:cNvPr id="18" name="TextBox 17"/>
           <p:cNvSpPr txBox="1"/>
           <p:nvPr/>
         </p:nvSpPr>
         <p:spPr>
           <a:xfrm>
-            <a:off x="6238874" y="2286000"/>
-            <a:ext cx="2309812" cy="1047750"/>
+            <a:off x="6238874" y="3333750"/>
+            <a:ext cx="2309812" cy="323850"/>
           </a:xfrm>
           <a:prstGeom prst="rect">
             <a:avLst/>
@@ -29218,13 +30384,13 @@
               </a:lnSpc>
             </a:pPr>
             <a:r>
-              <a:rPr sz="4000" b="1">
-                <a:solidFill>
-                  <a:srgbClr val="8B5CF6"/>
+              <a:rPr sz="1300" b="0">
+                <a:solidFill>
+                  <a:srgbClr val="94A3B8"/>
                 </a:solidFill>
                 <a:latin typeface="PingFang SC"/>
               </a:rPr>
-              <a:t>2</a:t>
+              <a:t>清单</a:t>
             </a:r>
           </a:p>
         </p:txBody>
@@ -29237,8 +30403,8 @@
         </p:nvSpPr>
         <p:spPr>
           <a:xfrm>
-            <a:off x="6238874" y="3333750"/>
-            <a:ext cx="2309812" cy="323850"/>
+            <a:off x="6391274" y="4057650"/>
+            <a:ext cx="2005012" cy="571500"/>
           </a:xfrm>
           <a:prstGeom prst="rect">
             <a:avLst/>
@@ -29257,51 +30423,12 @@
               </a:lnSpc>
             </a:pPr>
             <a:r>
-              <a:rPr sz="1300" b="0">
-                <a:solidFill>
-                  <a:srgbClr val="94A3B8"/>
+              <a:rPr sz="1300" b="1">
+                <a:solidFill>
+                  <a:srgbClr val="475569"/>
                 </a:solidFill>
                 <a:latin typeface="PingFang SC"/>
               </a:rPr>
-              <a:t>清单</a:t>
-            </a:r>
-          </a:p>
-        </p:txBody>
-      </p:sp>
-      <p:sp>
-        <p:nvSpPr>
-          <p:cNvPr id="20" name="TextBox 19"/>
-          <p:cNvSpPr txBox="1"/>
-          <p:nvPr/>
-        </p:nvSpPr>
-        <p:spPr>
-          <a:xfrm>
-            <a:off x="6391274" y="4057650"/>
-            <a:ext cx="2005012" cy="571500"/>
-          </a:xfrm>
-          <a:prstGeom prst="rect">
-            <a:avLst/>
-          </a:prstGeom>
-          <a:noFill/>
-        </p:spPr>
-        <p:txBody>
-          <a:bodyPr wrap="square" anchor="ctr">
-            <a:spAutoFit/>
-          </a:bodyPr>
-          <a:lstStyle/>
-          <a:p>
-            <a:pPr algn="ctr">
-              <a:lnSpc>
-                <a:spcPct val="100000"/>
-              </a:lnSpc>
-            </a:pPr>
-            <a:r>
-              <a:rPr sz="1300" b="1">
-                <a:solidFill>
-                  <a:srgbClr val="475569"/>
-                </a:solidFill>
-                <a:latin typeface="PingFang SC"/>
-              </a:rPr>
               <a:t>improved/regressed</a:t>
             </a:r>
           </a:p>
@@ -29309,7 +30436,7 @@
       </p:sp>
       <p:sp>
         <p:nvSpPr>
-          <p:cNvPr id="21" name="Rounded Rectangle 20"/>
+          <p:cNvPr id="20" name="Rounded Rectangle 19"/>
           <p:cNvSpPr/>
           <p:nvPr/>
         </p:nvSpPr>
@@ -29357,7 +30484,7 @@
       </p:sp>
       <p:sp>
         <p:nvSpPr>
-          <p:cNvPr id="22" name="Rectangle 21"/>
+          <p:cNvPr id="21" name="Rectangle 20"/>
           <p:cNvSpPr/>
           <p:nvPr/>
         </p:nvSpPr>
@@ -29401,14 +30528,53 @@
       </p:sp>
       <p:sp>
         <p:nvSpPr>
+          <p:cNvPr id="22" name="TextBox 21"/>
+          <p:cNvSpPr txBox="1"/>
+          <p:nvPr/>
+        </p:nvSpPr>
+        <p:spPr>
+          <a:xfrm>
+            <a:off x="8834436" y="2286000"/>
+            <a:ext cx="2309812" cy="1047750"/>
+          </a:xfrm>
+          <a:prstGeom prst="rect">
+            <a:avLst/>
+          </a:prstGeom>
+          <a:noFill/>
+        </p:spPr>
+        <p:txBody>
+          <a:bodyPr wrap="square" anchor="ctr">
+            <a:spAutoFit/>
+          </a:bodyPr>
+          <a:lstStyle/>
+          <a:p>
+            <a:pPr algn="ctr">
+              <a:lnSpc>
+                <a:spcPct val="100000"/>
+              </a:lnSpc>
+            </a:pPr>
+            <a:r>
+              <a:rPr sz="4000" b="1">
+                <a:solidFill>
+                  <a:srgbClr val="F59E0B"/>
+                </a:solidFill>
+                <a:latin typeface="PingFang SC"/>
+              </a:rPr>
+              <a:t>1</a:t>
+            </a:r>
+          </a:p>
+        </p:txBody>
+      </p:sp>
+      <p:sp>
+        <p:nvSpPr>
           <p:cNvPr id="23" name="TextBox 22"/>
           <p:cNvSpPr txBox="1"/>
           <p:nvPr/>
         </p:nvSpPr>
         <p:spPr>
           <a:xfrm>
-            <a:off x="8834436" y="2286000"/>
-            <a:ext cx="2309812" cy="1047750"/>
+            <a:off x="8834436" y="3333750"/>
+            <a:ext cx="2309812" cy="323850"/>
           </a:xfrm>
           <a:prstGeom prst="rect">
             <a:avLst/>
@@ -29427,13 +30593,13 @@
               </a:lnSpc>
             </a:pPr>
             <a:r>
-              <a:rPr sz="4000" b="1">
-                <a:solidFill>
-                  <a:srgbClr val="F59E0B"/>
+              <a:rPr sz="1300" b="0">
+                <a:solidFill>
+                  <a:srgbClr val="94A3B8"/>
                 </a:solidFill>
                 <a:latin typeface="PingFang SC"/>
               </a:rPr>
-              <a:t>1</a:t>
+              <a:t>红线</a:t>
             </a:r>
           </a:p>
         </p:txBody>
@@ -29446,8 +30612,8 @@
         </p:nvSpPr>
         <p:spPr>
           <a:xfrm>
-            <a:off x="8834436" y="3333750"/>
-            <a:ext cx="2309812" cy="323850"/>
+            <a:off x="8986836" y="4057650"/>
+            <a:ext cx="2005012" cy="571500"/>
           </a:xfrm>
           <a:prstGeom prst="rect">
             <a:avLst/>
@@ -29466,13 +30632,13 @@
               </a:lnSpc>
             </a:pPr>
             <a:r>
-              <a:rPr sz="1300" b="0">
-                <a:solidFill>
-                  <a:srgbClr val="94A3B8"/>
+              <a:rPr sz="1300" b="1">
+                <a:solidFill>
+                  <a:srgbClr val="475569"/>
                 </a:solidFill>
                 <a:latin typeface="PingFang SC"/>
               </a:rPr>
-              <a:t>红线</a:t>
+              <a:t>幻觉率</a:t>
             </a:r>
           </a:p>
         </p:txBody>
@@ -29485,8 +30651,8 @@
         </p:nvSpPr>
         <p:spPr>
           <a:xfrm>
-            <a:off x="8986836" y="4057650"/>
-            <a:ext cx="2005012" cy="571500"/>
+            <a:off x="10287000" y="6534150"/>
+            <a:ext cx="1619250" cy="266700"/>
           </a:xfrm>
           <a:prstGeom prst="rect">
             <a:avLst/>
@@ -29499,19 +30665,19 @@
           </a:bodyPr>
           <a:lstStyle/>
           <a:p>
-            <a:pPr algn="ctr">
+            <a:pPr algn="r">
               <a:lnSpc>
                 <a:spcPct val="100000"/>
               </a:lnSpc>
             </a:pPr>
             <a:r>
-              <a:rPr sz="1300" b="1">
-                <a:solidFill>
-                  <a:srgbClr val="475569"/>
+              <a:rPr sz="900" b="0">
+                <a:solidFill>
+                  <a:srgbClr val="94A3B8"/>
                 </a:solidFill>
                 <a:latin typeface="PingFang SC"/>
               </a:rPr>
-              <a:t>幻觉率|随故障增长:每修复+1 用例</a:t>
+              <a:t>第5章 · 8/33</a:t>
             </a:r>
           </a:p>
         </p:txBody>
@@ -29519,45 +30685,6 @@
       <p:sp>
         <p:nvSpPr>
           <p:cNvPr id="26" name="TextBox 25"/>
-          <p:cNvSpPr txBox="1"/>
-          <p:nvPr/>
-        </p:nvSpPr>
-        <p:spPr>
-          <a:xfrm>
-            <a:off x="10287000" y="6534150"/>
-            <a:ext cx="1619250" cy="266700"/>
-          </a:xfrm>
-          <a:prstGeom prst="rect">
-            <a:avLst/>
-          </a:prstGeom>
-          <a:noFill/>
-        </p:spPr>
-        <p:txBody>
-          <a:bodyPr wrap="square" anchor="ctr">
-            <a:spAutoFit/>
-          </a:bodyPr>
-          <a:lstStyle/>
-          <a:p>
-            <a:pPr algn="r">
-              <a:lnSpc>
-                <a:spcPct val="100000"/>
-              </a:lnSpc>
-            </a:pPr>
-            <a:r>
-              <a:rPr sz="900" b="0">
-                <a:solidFill>
-                  <a:srgbClr val="94A3B8"/>
-                </a:solidFill>
-                <a:latin typeface="PingFang SC"/>
-              </a:rPr>
-              <a:t>第5章 · 8/32</a:t>
-            </a:r>
-          </a:p>
-        </p:txBody>
-      </p:sp>
-      <p:sp>
-        <p:nvSpPr>
-          <p:cNvPr id="27" name="TextBox 26"/>
           <p:cNvSpPr txBox="1"/>
           <p:nvPr/>
         </p:nvSpPr>
@@ -30545,7 +31672,7 @@
                 </a:solidFill>
                 <a:latin typeface="PingFang SC"/>
               </a:rPr>
-              <a:t>第5章 · 9/32</a:t>
+              <a:t>第5章 · 9/33</a:t>
             </a:r>
           </a:p>
         </p:txBody>

--- a/03-课件PPT/讲次版/第5章-4-讲次 5-4 · Agent Eval核心护城河.pptx
+++ b/03-课件PPT/讲次版/第5章-4-讲次 5-4 · Agent Eval核心护城河.pptx
@@ -24846,7 +24846,7 @@
       </p:sp>
       <p:pic>
         <p:nvPicPr>
-          <p:cNvPr id="5" name="Picture 4" descr="chart_338991.png"/>
+          <p:cNvPr id="5" name="Picture 4" descr="chart_558436.png"/>
           <p:cNvPicPr>
             <a:picLocks noChangeAspect="1"/>
           </p:cNvPicPr>
@@ -28482,7 +28482,7 @@
       </p:sp>
       <p:pic>
         <p:nvPicPr>
-          <p:cNvPr id="5" name="Picture 4" descr="chart_298438.png"/>
+          <p:cNvPr id="5" name="Picture 4" descr="chart_1015426.png"/>
           <p:cNvPicPr>
             <a:picLocks noChangeAspect="1"/>
           </p:cNvPicPr>
